--- a/en/slides/16-Computer_Architecture-Permanent_Memory.pptx
+++ b/en/slides/16-Computer_Architecture-Permanent_Memory.pptx
@@ -126,32 +126,32 @@
   <p:extLst>
     <p:ext uri="{521415D9-36F7-43E2-AB2F-B90AF26B5E84}">
       <p14:sectionLst xmlns:p14="http://schemas.microsoft.com/office/powerpoint/2010/main">
-        <p14:section name="Opening" id="{e4930fb1-ec75-2c5f-2802-0e30aae0a9c6}">
+        <p14:section name="Opening" id="{2d875c4c-0248-b7d1-1e25-064c30b9dbce}">
           <p14:sldIdLst>
             <p14:sldId id="256"/>
             <p14:sldId id="257"/>
           </p14:sldIdLst>
         </p14:section>
-        <p14:section name="The components of a computer" id="{fc641741-27bc-49bf-2d02-c0110d4867d1}">
+        <p14:section name="The components of a computer" id="{4472aa4a-0f95-7762-a575-c90a54965bdd}">
           <p14:sldIdLst>
             <p14:sldId id="258"/>
             <p14:sldId id="259"/>
           </p14:sldIdLst>
         </p14:section>
-        <p14:section name="Non-volatile memories" id="{3bc7eeed-e66c-a912-cb90-0391864363fb}">
+        <p14:section name="Non-volatile memories" id="{b608a988-4679-5d67-37ac-f85fd7eff425}">
           <p14:sldIdLst>
             <p14:sldId id="260"/>
             <p14:sldId id="261"/>
           </p14:sldIdLst>
         </p14:section>
-        <p14:section name="The cache" id="{45e2566e-0b50-0df5-9e33-233c386d3438}">
+        <p14:section name="The cache" id="{b14d1dba-8021-db3a-61fe-a6169a2c1427}">
           <p14:sldIdLst>
             <p14:sldId id="262"/>
             <p14:sldId id="263"/>
             <p14:sldId id="264"/>
           </p14:sldIdLst>
         </p14:section>
-        <p14:section name="Secondary memory" id="{20511a3d-2cda-33fc-9be3-c4c9d44f2043}">
+        <p14:section name="Secondary memory" id="{96fa0d46-38e2-9262-cf41-75d7ac2a730b}">
           <p14:sldIdLst>
             <p14:sldId id="265"/>
             <p14:sldId id="266"/>
@@ -159,13 +159,13 @@
             <p14:sldId id="268"/>
           </p14:sldIdLst>
         </p14:section>
-        <p14:section name="Optical disks" id="{29196ea2-48b8-4c4a-a485-7372315df9b2}">
+        <p14:section name="Optical disks" id="{0d372b75-e744-8027-c2ec-49f970853f95}">
           <p14:sldIdLst>
             <p14:sldId id="269"/>
             <p14:sldId id="270"/>
           </p14:sldIdLst>
         </p14:section>
-        <p14:section name="Storage on several levels" id="{9d978bf6-a98b-765d-c9dd-2c9fcd643899}">
+        <p14:section name="Storage on several levels" id="{6d597a4d-7939-9ed8-bd97-7cf37550d26c}">
           <p14:sldIdLst>
             <p14:sldId id="271"/>
             <p14:sldId id="272"/>
@@ -668,7 +668,8 @@
             <a:r>
               <a:rPr lang="en-US" dirty="0"/>
               <a:t>Four properties define secondary memories with respect to the main memory. They are non-volatile. Their capacity is several orders of magnitude larger. Their cost per bit is several orders of magnitude lower. And their access is some orders of magnitude slower. Two more facts concern their organisation: information is stored in blocks, not in single bytes, and some media allow direct access to any block while others, like tapes, only sequential access.
-For the lecturer: The secondary memory stores and keeps all the programs and data of the computer; the main memory holds the programs being executed and the data they need.</a:t>
+For the lecturer: The secondary memory stores and keeps all the programs and data of the computer; the main memory holds the programs being executed and the data they need.
+Pictures: Open hard-drive.jpg, Zzubnik, Public domain, Wikimedia Commons.</a:t>
             </a:r>
             <a:endParaRPr lang="en-US" dirty="0"/>
           </a:p>
@@ -1024,7 +1025,8 @@
             <a:r>
               <a:rPr lang="en-US" dirty="0"/>
               <a:t>An optical disk is read by a laser beam whose reflection changes between the pits and the flat surface, the land. The point that is always asked in the exam: 0 and 1 are not pit and land. A 1 is a change, from pit to land or from land to pit; a 0 is no change. Such disks are usually written once, because the physical modification is irreversible, which makes them suitable for distributing programs and for archives that must not be altered.
-For the lecturer: Encoding a 1 as a transition is a self-clocking idea used in many serial links as well.</a:t>
+For the lecturer: Encoding a 1 as a transition is a self-clocking idea used in many serial links as well.
+Pictures: CD-ROM pressed pits.jpg, Tycho, CC0, Wikimedia Commons.</a:t>
             </a:r>
             <a:endParaRPr lang="en-US" dirty="0"/>
           </a:p>
@@ -1113,7 +1115,8 @@
             <a:r>
               <a:rPr lang="en-US" dirty="0"/>
               <a:t>In a compact disc the information is on a single spiral track, with a distance of 1.6 micrometres between one turn and the next. The recording density is constant along the spiral, so to read at a constant rate the disk must turn faster near the centre and more slowly near the edge: this is constant linear velocity. The alternative, constant angular velocity, keeps the rotation constant and wastes the outer part of the disk. The speed was originally set by the needs of music.
-For the lecturer: 1x = 1.2 m/s. CD-Recordable: two layers of polycarbonate enclose a thin reflective sheet covered by a translucent dye.</a:t>
+For the lecturer: 1x = 1.2 m/s. CD-Recordable: two layers of polycarbonate enclose a thin reflective sheet covered by a translucent dye.
+Pictures: CD Player focusing lens assembly.jpg, Zim 256, CC BY-SA 3.0, Wikimedia Commons.</a:t>
             </a:r>
             <a:endParaRPr lang="en-US" dirty="0"/>
           </a:p>
@@ -1560,7 +1563,7 @@
           <a:p>
             <a:r>
               <a:rPr lang="en-US" dirty="0"/>
-              <a:t>Six objectives. Name the functional units of a computer and find them on a motherboard and on the kit. Distinguish ROM, PROM, EPROM, EEPROM and flash, and say what firmware is. Explain why a cache makes a computer faster, and what a miss is. Describe tracks, sectors and blocks of a magnetic disk and the components of its access time. Explain how an optical disk stores bits. And place flash, solid-state disks, hard disks and tapes in a storage system with several levels.</a:t>
+              <a:t>Six objectives. Name the functional units of a computer and find them on a motherboard and on the kit. Distinguish ROM, PROM, EPROM, EEPROM and flash, and say what firmware is. Explain why a cache makes a computer faster, and what a miss is. Describe tracks, sectors and blocks of a magnetic disk and the components of its access time. Explain how an optical disk stores bits, and how a compact disc is read. And place flash, solid-state disks, hard disks and tapes in a storage system with several levels.</a:t>
             </a:r>
             <a:endParaRPr lang="en-US" dirty="0"/>
           </a:p>
@@ -2004,7 +2007,8 @@
             <a:r>
               <a:rPr lang="en-US" dirty="0"/>
               <a:t>Three properties of flash explain how it is used. It is erased by blocks, not by single bytes: erasing sets all the bits of a block to 1, and writing can only turn 1s into 0s. Each block survives a limited number of erasures, so a controller spreads the writes evenly. And reading is fast, while writing and above all erasing are slow. This is why the best score of the warm-up is not simply written into the cartridge at every frame: flash is not a place for variables.
-For the lecturer: This is why the best score of the warm-up is not simply written back into the cartridge at every frame: flash is not a place for variables.</a:t>
+For the lecturer: This is why the best score of the warm-up is not simply written back into the cartridge at every frame: flash is not a place for variables.
+Pictures: Pair of BIOS chips.jpg, Jud McCranie, CC BY-SA 4.0, Wikimedia Commons.</a:t>
             </a:r>
             <a:endParaRPr lang="en-US" dirty="0"/>
           </a:p>
@@ -3301,7 +3305,63 @@
       </p:sp>
       <p:sp>
         <p:nvSpPr>
-          <p:cNvPr id="12" name="Shape 10"/>
+          <p:cNvPr id="12" name="Text 10"/>
+          <p:cNvSpPr txBox="1"/>
+          <p:nvPr/>
+        </p:nvSpPr>
+        <p:spPr>
+          <a:xfrm>
+            <a:off x="4693615" y="566928"/>
+            <a:ext cx="6949440" cy="640080"/>
+          </a:xfrm>
+          <a:prstGeom prst="rect">
+            <a:avLst/>
+          </a:prstGeom>
+          <a:noFill/>
+          <a:ln/>
+        </p:spPr>
+        <p:txBody>
+          <a:bodyPr wrap="square" lIns="0" tIns="0" rIns="0" bIns="0" rtlCol="0" anchor="t"/>
+          <a:lstStyle/>
+          <a:p>
+            <a:pPr algn="r" indent="0" marL="0">
+              <a:buNone/>
+            </a:pPr>
+            <a:r>
+              <a:rPr lang="en-US" sz="1300" dirty="0">
+                <a:solidFill>
+                  <a:srgbClr val="CFE3EA"/>
+                </a:solidFill>
+                <a:latin typeface="Calibri" pitchFamily="34" charset="0"/>
+                <a:ea typeface="Calibri" pitchFamily="34" charset="-122"/>
+                <a:cs typeface="Calibri" pitchFamily="34" charset="-120"/>
+              </a:rPr>
+              <a:t>Lecture deck. The listings, the complete program and how to test it are in the code deck:</a:t>
+            </a:r>
+            <a:endParaRPr lang="en-US" sz="1300" dirty="0"/>
+          </a:p>
+          <a:p>
+            <a:pPr algn="r" indent="0" marL="0">
+              <a:buNone/>
+            </a:pPr>
+            <a:r>
+              <a:rPr lang="en-US" sz="1300" dirty="0">
+                <a:solidFill>
+                  <a:srgbClr val="CFE3EA"/>
+                </a:solidFill>
+                <a:latin typeface="Calibri" pitchFamily="34" charset="0"/>
+                <a:ea typeface="Calibri" pitchFamily="34" charset="-122"/>
+                <a:cs typeface="Calibri" pitchFamily="34" charset="-120"/>
+              </a:rPr>
+              <a:t>16-Computer_Architecture-Permanent_Memory-Code.pptx</a:t>
+            </a:r>
+            <a:endParaRPr lang="en-US" sz="1300" dirty="0"/>
+          </a:p>
+        </p:txBody>
+      </p:sp>
+      <p:sp>
+        <p:nvSpPr>
+          <p:cNvPr id="13" name="Shape 11"/>
           <p:cNvSpPr/>
           <p:nvPr/>
         </p:nvSpPr>
@@ -3328,7 +3388,7 @@
       </p:sp>
       <p:pic>
         <p:nvPicPr>
-          <p:cNvPr id="13" name="Image 0" descr="/Users/raffaelemontella/devel/riscv-prg32/computer-architecture-with-prg32/tools/assets/game_platformer.png">    </p:cNvPr>
+          <p:cNvPr id="14" name="Image 0" descr="/Users/raffaelemontella/devel/riscv-prg32/computer-architecture-with-prg32/tools/assets/game_platformer.png">    </p:cNvPr>
           <p:cNvPicPr>
             <a:picLocks noChangeAspect="1"/>
           </p:cNvPicPr>
@@ -3882,8 +3942,8 @@
         </p:blipFill>
         <p:spPr>
           <a:xfrm>
-            <a:off x="7863840" y="1676552"/>
-            <a:ext cx="3779215" cy="3779215"/>
+            <a:off x="7863840" y="1918658"/>
+            <a:ext cx="3779215" cy="3295003"/>
           </a:xfrm>
           <a:prstGeom prst="rect">
             <a:avLst/>
@@ -3923,7 +3983,7 @@
                 <a:ea typeface="Calibri" pitchFamily="34" charset="-122"/>
                 <a:cs typeface="Calibri" pitchFamily="34" charset="-120"/>
               </a:rPr>
-              <a:t>A 6 TB hard disk drive</a:t>
+              <a:t>An open hard disk: platter, arm and head</a:t>
             </a:r>
             <a:endParaRPr lang="en-US" sz="1200" dirty="0"/>
           </a:p>
@@ -5955,8 +6015,8 @@
         </p:blipFill>
         <p:spPr>
           <a:xfrm>
-            <a:off x="7863840" y="2111162"/>
-            <a:ext cx="3779215" cy="2909996"/>
+            <a:off x="7863840" y="2148954"/>
+            <a:ext cx="3779215" cy="2834411"/>
           </a:xfrm>
           <a:prstGeom prst="rect">
             <a:avLst/>
@@ -5996,7 +6056,7 @@
                 <a:ea typeface="Calibri" pitchFamily="34" charset="-122"/>
                 <a:cs typeface="Calibri" pitchFamily="34" charset="-120"/>
               </a:rPr>
-              <a:t>Pits and lands, and the light the sensor sees</a:t>
+              <a:t>Pits and lands of a pressed CD-ROM, under an electron microscope</a:t>
             </a:r>
             <a:endParaRPr lang="en-US" sz="1200" dirty="0"/>
           </a:p>
@@ -6507,8 +6567,8 @@
         </p:blipFill>
         <p:spPr>
           <a:xfrm>
-            <a:off x="7863840" y="2167671"/>
-            <a:ext cx="3779215" cy="2796979"/>
+            <a:off x="7863840" y="2148954"/>
+            <a:ext cx="3779215" cy="2834411"/>
           </a:xfrm>
           <a:prstGeom prst="rect">
             <a:avLst/>
@@ -12122,7 +12182,7 @@
                 <a:ea typeface="Calibri" pitchFamily="34" charset="-122"/>
                 <a:cs typeface="Calibri" pitchFamily="34" charset="-120"/>
               </a:rPr>
-              <a:t>Explain how an optical disk stores bits, and compare CD and DVD</a:t>
+              <a:t>Explain how an optical disk stores bits, and how a compact disc is read</a:t>
             </a:r>
             <a:endParaRPr lang="en-US" sz="2200" dirty="0"/>
           </a:p>
@@ -16641,8 +16701,8 @@
         </p:blipFill>
         <p:spPr>
           <a:xfrm>
-            <a:off x="7863840" y="1676552"/>
-            <a:ext cx="3779215" cy="3779215"/>
+            <a:off x="7863840" y="1890610"/>
+            <a:ext cx="3779215" cy="3351101"/>
           </a:xfrm>
           <a:prstGeom prst="rect">
             <a:avLst/>

--- a/en/slides/16-Computer_Architecture-Permanent_Memory.pptx
+++ b/en/slides/16-Computer_Architecture-Permanent_Memory.pptx
@@ -126,32 +126,32 @@
   <p:extLst>
     <p:ext uri="{521415D9-36F7-43E2-AB2F-B90AF26B5E84}">
       <p14:sectionLst xmlns:p14="http://schemas.microsoft.com/office/powerpoint/2010/main">
-        <p14:section name="Opening" id="{2d875c4c-0248-b7d1-1e25-064c30b9dbce}">
+        <p14:section name="Opening" id="{ee19e755-90bc-576c-763e-13e324b86c05}">
           <p14:sldIdLst>
             <p14:sldId id="256"/>
             <p14:sldId id="257"/>
           </p14:sldIdLst>
         </p14:section>
-        <p14:section name="The components of a computer" id="{4472aa4a-0f95-7762-a575-c90a54965bdd}">
+        <p14:section name="The components of a computer" id="{6510b08d-6e6a-5508-c4f4-9a2d4a0c7f81}">
           <p14:sldIdLst>
             <p14:sldId id="258"/>
             <p14:sldId id="259"/>
           </p14:sldIdLst>
         </p14:section>
-        <p14:section name="Non-volatile memories" id="{b608a988-4679-5d67-37ac-f85fd7eff425}">
+        <p14:section name="Non-volatile memories" id="{e0779cfa-51fd-d26e-049b-992490860556}">
           <p14:sldIdLst>
             <p14:sldId id="260"/>
             <p14:sldId id="261"/>
           </p14:sldIdLst>
         </p14:section>
-        <p14:section name="The cache" id="{b14d1dba-8021-db3a-61fe-a6169a2c1427}">
+        <p14:section name="The cache" id="{b125a1a8-4b7b-2f12-aec7-fa335b8d35b2}">
           <p14:sldIdLst>
             <p14:sldId id="262"/>
             <p14:sldId id="263"/>
             <p14:sldId id="264"/>
           </p14:sldIdLst>
         </p14:section>
-        <p14:section name="Secondary memory" id="{96fa0d46-38e2-9262-cf41-75d7ac2a730b}">
+        <p14:section name="Secondary memory" id="{b0bdf76e-20f0-982c-1101-a9d03d21088a}">
           <p14:sldIdLst>
             <p14:sldId id="265"/>
             <p14:sldId id="266"/>
@@ -159,13 +159,13 @@
             <p14:sldId id="268"/>
           </p14:sldIdLst>
         </p14:section>
-        <p14:section name="Optical disks" id="{0d372b75-e744-8027-c2ec-49f970853f95}">
+        <p14:section name="Optical disks" id="{06642e2b-031c-a64a-9b4a-5ecbe69ec395}">
           <p14:sldIdLst>
             <p14:sldId id="269"/>
             <p14:sldId id="270"/>
           </p14:sldIdLst>
         </p14:section>
-        <p14:section name="Storage on several levels" id="{6d597a4d-7939-9ed8-bd97-7cf37550d26c}">
+        <p14:section name="Storage on several levels" id="{3c5c4837-ddea-9832-6992-86e0f7d10192}">
           <p14:sldIdLst>
             <p14:sldId id="271"/>
             <p14:sldId id="272"/>
@@ -579,6 +579,8 @@
             <a:r>
               <a:rPr lang="en-US" dirty="0"/>
               <a:t>The previous lecture dealt with the memory that forgets when the power goes. This one deals with the memories that do not: the chips that hold the firmware, the disks, the optical media, the tapes. Between the two it places the cache, a small fast memory that hides the slowness of a large one. The quotation is by a professor of numerical computing of this university, and every student learns its truth sooner or later: a datum does not exist unless it has been saved.
+Learning status: UNDERSTAND NOW, by the end of this lecture you explain it, trace it and apply it on your own; USE NOW, you follow and use the recipe today; how it works inside is explained later, or is not part of the course; UNDERSTAND LATER, recognise the name and what it is for; a later lecture explains it. A slide without a badge is context: a story, an example, a question, an exercise.
+Learning status of this lecture. UNDERSTAND NOW: ROM, flash, firmware; the von Neumann architecture; the cache; secondary memory. USE NOW: the complete program, the PRG32 tools (used, not studied, in this course). UNDERSTAND LATER: nothing. A slide without a badge is context: a story, an example, a question, an exercise.
 For the lecturer: Spiral: a cartridge keeps its title string across a power cycle but loses its high score; the lecture explains where each lives, then covers ROM and flash, the cache, and mass storage.</a:t>
             </a:r>
             <a:endParaRPr lang="en-US" dirty="0"/>
@@ -668,6 +670,7 @@
             <a:r>
               <a:rPr lang="en-US" dirty="0"/>
               <a:t>Four properties define secondary memories with respect to the main memory. They are non-volatile. Their capacity is several orders of magnitude larger. Their cost per bit is several orders of magnitude lower. And their access is some orders of magnitude slower. Two more facts concern their organisation: information is stored in blocks, not in single bytes, and some media allow direct access to any block while others, like tapes, only sequential access.
+UNDERSTAND NOW: secondary memory.
 For the lecturer: The secondary memory stores and keeps all the programs and data of the computer; the main memory holds the programs being executed and the data they need.
 Pictures: Open hard-drive.jpg, Zzubnik, Public domain, Wikimedia Commons.</a:t>
             </a:r>
@@ -758,6 +761,7 @@
             <a:r>
               <a:rPr lang="en-US" dirty="0"/>
               <a:t>The geometry of a magnetic disk. Platters coated with a magnetisable material spin at constant speed, and heads read and write. The surface is divided into concentric tracks and into sectors, slices like those of a cake. A sector cuts each track into blocks, and the block, identified by its track and sector, is the smallest unit that can be addressed. Formatting is the operation that draws this division. Access is direct: the head goes to any block without passing over all the previous ones.
+UNDERSTAND NOW: secondary memory.
 For the lecturer: Dischi magnetici. Several sectors form a cluster; the tracks at the same radius on all the platters form a cylinder. The original picture had Italian labels and is redrawn.</a:t>
             </a:r>
             <a:endParaRPr lang="en-US" dirty="0"/>
@@ -847,6 +851,7 @@
             <a:r>
               <a:rPr lang="en-US" dirty="0"/>
               <a:t>The access time of a disk is the sum of three times. Seek time: the time to move the head radially to the right track. Latency: the wait for the desired sector to pass under the head, which depends on the speed of rotation. Transfer time: the time for the block to pass under the head. The total is a matter of milliseconds: a million times slower than RAM. In the time of one disk access the processor of the kit could execute more than a hundred thousand instructions.
+UNDERSTAND NOW: secondary memory.
 For the lecturer: A millisecond is a million nanoseconds: during one disk access a 160 MHz processor could execute more than a hundred thousand instructions.</a:t>
             </a:r>
             <a:endParaRPr lang="en-US" dirty="0"/>
@@ -936,6 +941,7 @@
             <a:r>
               <a:rPr lang="en-US" dirty="0"/>
               <a:t>Two technologies for the same job. A hard disk has magnetic platters and moving heads: its access time is dominated by mechanics, but its cost per terabyte is the lowest, and it remains the choice for large archives and backups. A solid-state disk is flash memory with a controller and no moving parts: its access time is tens of microseconds, and it is the standard storage of laptops and phones. It is the same technology as the flash chip of the kit.
+UNDERSTAND NOW: secondary memory.
 For the lecturer: New with respect to the original deck, which listed SSDs only among the storage levels. The parallel ATA bus of older PCs gave way to Serial ATA and then to NVMe.</a:t>
             </a:r>
             <a:endParaRPr lang="en-US" dirty="0"/>
@@ -1025,6 +1031,7 @@
             <a:r>
               <a:rPr lang="en-US" dirty="0"/>
               <a:t>An optical disk is read by a laser beam whose reflection changes between the pits and the flat surface, the land. The point that is always asked in the exam: 0 and 1 are not pit and land. A 1 is a change, from pit to land or from land to pit; a 0 is no change. Such disks are usually written once, because the physical modification is irreversible, which makes them suitable for distributing programs and for archives that must not be altered.
+UNDERSTAND NOW: secondary memory.
 For the lecturer: Encoding a 1 as a transition is a self-clocking idea used in many serial links as well.
 Pictures: CD-ROM pressed pits.jpg, Tycho, CC0, Wikimedia Commons.</a:t>
             </a:r>
@@ -1115,6 +1122,7 @@
             <a:r>
               <a:rPr lang="en-US" dirty="0"/>
               <a:t>In a compact disc the information is on a single spiral track, with a distance of 1.6 micrometres between one turn and the next. The recording density is constant along the spiral, so to read at a constant rate the disk must turn faster near the centre and more slowly near the edge: this is constant linear velocity. The alternative, constant angular velocity, keeps the rotation constant and wastes the outer part of the disk. The speed was originally set by the needs of music.
+UNDERSTAND NOW: secondary memory.
 For the lecturer: 1x = 1.2 m/s. CD-Recordable: two layers of polycarbonate enclose a thin reflective sheet covered by a translucent dye.
 Pictures: CD Player focusing lens assembly.jpg, Zim 256, CC BY-SA 3.0, Wikimedia Commons.</a:t>
             </a:r>
@@ -1205,6 +1213,7 @@
             <a:r>
               <a:rPr lang="en-US" dirty="0"/>
               <a:t>Five levels of permanent memory, from the fastest to the cheapest: a RAM disk, which is a piece of main memory used as a disk; solid-state disks; hard disks; disk libraries, in which some disks are switched on only when needed; and tape libraries, in which robots mount the tapes. The system moves the data automatically: what is used often migrates towards the fast levels, the rest sinks towards the cheap ones. It is the idea of the cache, applied to storage.
+UNDERSTAND NOW: secondary memory.
 For the lecturer: The same idea as the cache, applied to storage. The department's HPC storage works this way (visit at the end of the course).</a:t>
             </a:r>
             <a:endParaRPr lang="en-US" dirty="0"/>
@@ -1652,6 +1661,7 @@
             <a:r>
               <a:rPr lang="en-US" dirty="0"/>
               <a:t>Five conclusions. Non-volatile memories usually hold the firmware, the basic software of a machine. The cache improves performance by keeping a copy of part of the main memory close to the processor. The same idea, a small fast level in front of a large slow one, is used again in storage. Permanent memories can be semiconductor, magnetic or optical. And a modern system has several levels, managed automatically. Next comes Part 3 of Verm1, which uses memory as it has never been used so far in the project.
+Learning status, recap. UNDERSTAND NOW: ROM, flash, firmware; the von Neumann architecture; the cache; secondary memory. USE NOW: the complete program, the PRG32 tools (used, not studied, in this course). UNDERSTAND LATER: nothing. A slide without a badge is context: a story, an example, a question, an exercise.
 For the lecturer: Next: Verm1, part 3: a body, rules and states. Then the processor.</a:t>
             </a:r>
             <a:endParaRPr lang="en-US" dirty="0"/>
@@ -1740,7 +1750,8 @@
           <a:p>
             <a:r>
               <a:rPr lang="en-US" dirty="0"/>
-              <a:t>Six cards: the processor, the main memory, the secondary memory, the input and output devices, the communication lines, and a remark about packaging. Each card names the unit and then says where it is on the kit: the RISC-V core, the 512 KB of SRAM, the flash chip, the display with joystick and amplifier. The last card is the difference between a PC and a microcontroller: the first spreads the units over a motherboard, the second puts almost all of them in one package.</a:t>
+              <a:t>Six cards: the processor, the main memory, the secondary memory, the input and output devices, the communication lines, and a remark about packaging. Each card names the unit and then says where it is on the kit: the RISC-V core, the 512 KB of SRAM, the flash chip, the display with joystick and amplifier. The last card is the difference between a PC and a microcontroller: the first spreads the units over a motherboard, the second puts almost all of them in one package.
+UNDERSTAND NOW: the von Neumann architecture.</a:t>
             </a:r>
             <a:endParaRPr lang="en-US" dirty="0"/>
           </a:p>
@@ -1829,6 +1840,7 @@
             <a:r>
               <a:rPr lang="en-US" dirty="0"/>
               <a:t>Firmware is the basic software kept in a non-volatile memory. In a PC it was called BIOS and did four jobs: test the devices at power-on, configure them, start the operating system, and offer basic functions for keyboard and disks; today its heir is called UEFI. The kit has a similar chain: a small program in ROM starts a bootloader in flash, which starts the PRG32 firmware, which loads the cartridge you choose. Each stage finds, checks and starts the next.
+UNDERSTAND NOW: ROM, flash, firmware.
 For the lecturer: Each stage finds, checks and starts the next: a chain that ends with the first instruction of first_init.</a:t>
             </a:r>
             <a:endParaRPr lang="en-US" dirty="0"/>
@@ -1918,6 +1930,7 @@
             <a:r>
               <a:rPr lang="en-US" dirty="0"/>
               <a:t>Read the table from top to bottom as a history of convenience. A ROM is written by the manufacturer once and for all. A PROM can be written by the user, once. An EPROM can be erased, all at once, by exposing it to ultraviolet light through a small window, and written again. An EEPROM is erased electrically, one byte at a time, without removing it. Flash is erased electrically in blocks: less flexible than EEPROM, but much cheaper, and today it is everywhere.
+UNDERSTAND NOW: ROM, flash, firmware.
 For the lecturer: Read-only memory; programmable ROM; erasable PROM; electrically erasable PROM. Access time of the order of nanoseconds for reading. EEPROM and flash are slower and, per bit, once dearer than RAM; flash is today the cheapest semiconductor memory.</a:t>
             </a:r>
             <a:endParaRPr lang="en-US" dirty="0"/>
@@ -2007,6 +2020,7 @@
             <a:r>
               <a:rPr lang="en-US" dirty="0"/>
               <a:t>Three properties of flash explain how it is used. It is erased by blocks, not by single bytes: erasing sets all the bits of a block to 1, and writing can only turn 1s into 0s. Each block survives a limited number of erasures, so a controller spreads the writes evenly. And reading is fast, while writing and above all erasing are slow. This is why the best score of the warm-up is not simply written into the cartridge at every frame: flash is not a place for variables.
+UNDERSTAND NOW: ROM, flash, firmware.
 For the lecturer: This is why the best score of the warm-up is not simply written back into the cartridge at every frame: flash is not a place for variables.
 Pictures: Pair of BIOS chips.jpg, Jud McCranie, CC BY-SA 4.0, Wikimedia Commons.</a:t>
             </a:r>
@@ -2097,6 +2111,7 @@
             <a:r>
               <a:rPr lang="en-US" dirty="0"/>
               <a:t>While the memory is being read or written the processor waits, and the slower the memory the more clock cycles are lost. Why not make all the memory as fast as the registers? Because it would have to be on the same chip as the processor, and it could not then be large. The compromise: a small, fast memory on the processor chip, and a larger, slower one reached through the bus.
+UNDERSTAND NOW: the cache.
 For the lecturer: Perché non costruire memorie veloci quanto i registri della CPU?</a:t>
             </a:r>
             <a:endParaRPr lang="en-US" dirty="0"/>
@@ -2186,6 +2201,7 @@
             <a:r>
               <a:rPr lang="en-US" dirty="0"/>
               <a:t>The cache sits between the processor and the main memory. At every access the processor looks in the cache first. If the content of the requested address is there, it is a hit and the datum arrives at once. If it is not, it is a miss: the datum is copied from the main memory into the cache, together with a number of neighbouring locations. The bet behind this is the principle of locality: a program that has just used an address will probably use it, or its neighbours, again soon. Loops and arrays are the reason.
+UNDERSTAND NOW: the cache.
 For the lecturer: The principle of locality: a program that has just used an address will probably use it again soon (temporal locality) and will probably use its neighbours (spatial locality). Loops and arrays are the reason.</a:t>
             </a:r>
             <a:endParaRPr lang="en-US" dirty="0"/>
@@ -2275,6 +2291,7 @@
             <a:r>
               <a:rPr lang="en-US" dirty="0"/>
               <a:t>Typical numbers. A PC has several levels of cache: a first level of tens of kilobytes inside each core, a second level of hundreds of kilobytes, and a third level of megabytes shared by the cores. The last column is the kit: no cache at all in front of its SRAM, because that memory is already as fast as the core needs; only the external flash is read through a small cache. Comparing the three columns also shows how main memory and storage have grown in twenty years.
+UNDERSTAND NOW: the cache.
 For the lecturer: First level (internal): keeps a continuous flow inside the processor. Second level: limits the slowdown due to the main memory. Third level (8 to 32 MB and more): shared by the cores of the same processor. Caches are built with SRAM. On the ESP32-C6 the SRAM is already as fast as the core needs; only the external flash sits behind a cache.</a:t>
             </a:r>
             <a:endParaRPr lang="en-US" dirty="0"/>
@@ -3412,6 +3429,420 @@
       </p:pic>
       <p:sp>
         <p:nvSpPr>
+          <p:cNvPr id="15" name="Shape 12"/>
+          <p:cNvSpPr/>
+          <p:nvPr/>
+        </p:nvSpPr>
+        <p:spPr>
+          <a:xfrm>
+            <a:off x="9690303" y="91440"/>
+            <a:ext cx="1952752" cy="274320"/>
+          </a:xfrm>
+          <a:prstGeom prst="rect">
+            <a:avLst/>
+          </a:prstGeom>
+          <a:solidFill>
+            <a:srgbClr val="F3E8FF"/>
+          </a:solidFill>
+          <a:ln w="12700">
+            <a:solidFill>
+              <a:srgbClr val="7E22CE"/>
+            </a:solidFill>
+            <a:prstDash val="dash"/>
+          </a:ln>
+        </p:spPr>
+      </p:sp>
+      <p:sp>
+        <p:nvSpPr>
+          <p:cNvPr id="16" name="Shape 13"/>
+          <p:cNvSpPr/>
+          <p:nvPr/>
+        </p:nvSpPr>
+        <p:spPr>
+          <a:xfrm>
+            <a:off x="9717735" y="128016"/>
+            <a:ext cx="45720" cy="45720"/>
+          </a:xfrm>
+          <a:prstGeom prst="rect">
+            <a:avLst/>
+          </a:prstGeom>
+          <a:solidFill>
+            <a:srgbClr val="7E22CE"/>
+          </a:solidFill>
+          <a:ln w="12700">
+            <a:solidFill>
+              <a:srgbClr val="7E22CE"/>
+            </a:solidFill>
+            <a:prstDash val="solid"/>
+          </a:ln>
+        </p:spPr>
+      </p:sp>
+      <p:sp>
+        <p:nvSpPr>
+          <p:cNvPr id="17" name="Shape 14"/>
+          <p:cNvSpPr/>
+          <p:nvPr/>
+        </p:nvSpPr>
+        <p:spPr>
+          <a:xfrm>
+            <a:off x="9717735" y="205740"/>
+            <a:ext cx="45720" cy="45720"/>
+          </a:xfrm>
+          <a:prstGeom prst="rect">
+            <a:avLst/>
+          </a:prstGeom>
+          <a:solidFill>
+            <a:srgbClr val="7E22CE"/>
+          </a:solidFill>
+          <a:ln w="12700">
+            <a:solidFill>
+              <a:srgbClr val="7E22CE"/>
+            </a:solidFill>
+            <a:prstDash val="solid"/>
+          </a:ln>
+        </p:spPr>
+      </p:sp>
+      <p:sp>
+        <p:nvSpPr>
+          <p:cNvPr id="18" name="Shape 15"/>
+          <p:cNvSpPr/>
+          <p:nvPr/>
+        </p:nvSpPr>
+        <p:spPr>
+          <a:xfrm>
+            <a:off x="9717735" y="283464"/>
+            <a:ext cx="45720" cy="45720"/>
+          </a:xfrm>
+          <a:prstGeom prst="rect">
+            <a:avLst/>
+          </a:prstGeom>
+          <a:solidFill>
+            <a:srgbClr val="7E22CE"/>
+          </a:solidFill>
+          <a:ln w="12700">
+            <a:solidFill>
+              <a:srgbClr val="7E22CE"/>
+            </a:solidFill>
+            <a:prstDash val="solid"/>
+          </a:ln>
+        </p:spPr>
+      </p:sp>
+      <p:pic>
+        <p:nvPicPr>
+          <p:cNvPr id="19" name="Image 1" descr="preencoded.png">    </p:cNvPr>
+          <p:cNvPicPr>
+            <a:picLocks noChangeAspect="1"/>
+          </p:cNvPicPr>
+          <p:nvPr/>
+        </p:nvPicPr>
+        <p:blipFill>
+          <a:blip r:embed="rId2"/>
+          <a:stretch>
+            <a:fillRect/>
+          </a:stretch>
+        </p:blipFill>
+        <p:spPr>
+          <a:xfrm>
+            <a:off x="9818319" y="128016"/>
+            <a:ext cx="201168" cy="201168"/>
+          </a:xfrm>
+          <a:prstGeom prst="rect">
+            <a:avLst/>
+          </a:prstGeom>
+        </p:spPr>
+      </p:pic>
+      <p:sp>
+        <p:nvSpPr>
+          <p:cNvPr id="20" name="Text 16"/>
+          <p:cNvSpPr txBox="1"/>
+          <p:nvPr/>
+        </p:nvSpPr>
+        <p:spPr>
+          <a:xfrm>
+            <a:off x="10074351" y="91440"/>
+            <a:ext cx="1532128" cy="274320"/>
+          </a:xfrm>
+          <a:prstGeom prst="rect">
+            <a:avLst/>
+          </a:prstGeom>
+          <a:noFill/>
+          <a:ln/>
+        </p:spPr>
+        <p:txBody>
+          <a:bodyPr wrap="square" lIns="0" tIns="0" rIns="0" bIns="0" rtlCol="0" anchor="ctr"/>
+          <a:lstStyle/>
+          <a:p>
+            <a:pPr indent="0" marL="0">
+              <a:buNone/>
+            </a:pPr>
+            <a:r>
+              <a:rPr lang="en-US" sz="1100" b="1" dirty="0">
+                <a:solidFill>
+                  <a:srgbClr val="6B21A8"/>
+                </a:solidFill>
+                <a:latin typeface="Calibri" pitchFamily="34" charset="0"/>
+                <a:ea typeface="Calibri" pitchFamily="34" charset="-122"/>
+                <a:cs typeface="Calibri" pitchFamily="34" charset="-120"/>
+              </a:rPr>
+              <a:t>UNDERSTAND LATER</a:t>
+            </a:r>
+            <a:endParaRPr lang="en-US" sz="1100" dirty="0"/>
+          </a:p>
+        </p:txBody>
+      </p:sp>
+      <p:sp>
+        <p:nvSpPr>
+          <p:cNvPr id="21" name="Shape 17"/>
+          <p:cNvSpPr/>
+          <p:nvPr/>
+        </p:nvSpPr>
+        <p:spPr>
+          <a:xfrm>
+            <a:off x="8407349" y="91440"/>
+            <a:ext cx="1173226" cy="274320"/>
+          </a:xfrm>
+          <a:prstGeom prst="rect">
+            <a:avLst/>
+          </a:prstGeom>
+          <a:solidFill>
+            <a:srgbClr val="FEF3C7"/>
+          </a:solidFill>
+          <a:ln w="12700">
+            <a:solidFill>
+              <a:srgbClr val="B45309"/>
+            </a:solidFill>
+            <a:prstDash val="solid"/>
+          </a:ln>
+        </p:spPr>
+      </p:sp>
+      <p:sp>
+        <p:nvSpPr>
+          <p:cNvPr id="22" name="Shape 18"/>
+          <p:cNvSpPr/>
+          <p:nvPr/>
+        </p:nvSpPr>
+        <p:spPr>
+          <a:xfrm>
+            <a:off x="8407349" y="91440"/>
+            <a:ext cx="27432" cy="274320"/>
+          </a:xfrm>
+          <a:prstGeom prst="rect">
+            <a:avLst/>
+          </a:prstGeom>
+          <a:solidFill>
+            <a:srgbClr val="B45309"/>
+          </a:solidFill>
+          <a:ln w="12700">
+            <a:solidFill>
+              <a:srgbClr val="B45309"/>
+            </a:solidFill>
+            <a:prstDash val="solid"/>
+          </a:ln>
+        </p:spPr>
+      </p:sp>
+      <p:sp>
+        <p:nvSpPr>
+          <p:cNvPr id="23" name="Shape 19"/>
+          <p:cNvSpPr/>
+          <p:nvPr/>
+        </p:nvSpPr>
+        <p:spPr>
+          <a:xfrm>
+            <a:off x="8462213" y="91440"/>
+            <a:ext cx="27432" cy="274320"/>
+          </a:xfrm>
+          <a:prstGeom prst="rect">
+            <a:avLst/>
+          </a:prstGeom>
+          <a:solidFill>
+            <a:srgbClr val="B45309"/>
+          </a:solidFill>
+          <a:ln w="12700">
+            <a:solidFill>
+              <a:srgbClr val="B45309"/>
+            </a:solidFill>
+            <a:prstDash val="solid"/>
+          </a:ln>
+        </p:spPr>
+      </p:sp>
+      <p:pic>
+        <p:nvPicPr>
+          <p:cNvPr id="24" name="Image 2" descr="preencoded.png">    </p:cNvPr>
+          <p:cNvPicPr>
+            <a:picLocks noChangeAspect="1"/>
+          </p:cNvPicPr>
+          <p:nvPr/>
+        </p:nvPicPr>
+        <p:blipFill>
+          <a:blip r:embed="rId3"/>
+          <a:stretch>
+            <a:fillRect/>
+          </a:stretch>
+        </p:blipFill>
+        <p:spPr>
+          <a:xfrm>
+            <a:off x="8535365" y="128016"/>
+            <a:ext cx="201168" cy="201168"/>
+          </a:xfrm>
+          <a:prstGeom prst="rect">
+            <a:avLst/>
+          </a:prstGeom>
+        </p:spPr>
+      </p:pic>
+      <p:sp>
+        <p:nvSpPr>
+          <p:cNvPr id="25" name="Text 20"/>
+          <p:cNvSpPr txBox="1"/>
+          <p:nvPr/>
+        </p:nvSpPr>
+        <p:spPr>
+          <a:xfrm>
+            <a:off x="8791397" y="91440"/>
+            <a:ext cx="752602" cy="274320"/>
+          </a:xfrm>
+          <a:prstGeom prst="rect">
+            <a:avLst/>
+          </a:prstGeom>
+          <a:noFill/>
+          <a:ln/>
+        </p:spPr>
+        <p:txBody>
+          <a:bodyPr wrap="square" lIns="0" tIns="0" rIns="0" bIns="0" rtlCol="0" anchor="ctr"/>
+          <a:lstStyle/>
+          <a:p>
+            <a:pPr indent="0" marL="0">
+              <a:buNone/>
+            </a:pPr>
+            <a:r>
+              <a:rPr lang="en-US" sz="1100" b="1" dirty="0">
+                <a:solidFill>
+                  <a:srgbClr val="92400E"/>
+                </a:solidFill>
+                <a:latin typeface="Calibri" pitchFamily="34" charset="0"/>
+                <a:ea typeface="Calibri" pitchFamily="34" charset="-122"/>
+                <a:cs typeface="Calibri" pitchFamily="34" charset="-120"/>
+              </a:rPr>
+              <a:t>USE NOW</a:t>
+            </a:r>
+            <a:endParaRPr lang="en-US" sz="1100" dirty="0"/>
+          </a:p>
+        </p:txBody>
+      </p:sp>
+      <p:sp>
+        <p:nvSpPr>
+          <p:cNvPr id="26" name="Shape 21"/>
+          <p:cNvSpPr/>
+          <p:nvPr/>
+        </p:nvSpPr>
+        <p:spPr>
+          <a:xfrm>
+            <a:off x="6518097" y="91440"/>
+            <a:ext cx="1779524" cy="274320"/>
+          </a:xfrm>
+          <a:prstGeom prst="rect">
+            <a:avLst/>
+          </a:prstGeom>
+          <a:solidFill>
+            <a:srgbClr val="E0F2FE"/>
+          </a:solidFill>
+          <a:ln w="12700">
+            <a:solidFill>
+              <a:srgbClr val="0369A1"/>
+            </a:solidFill>
+            <a:prstDash val="solid"/>
+          </a:ln>
+        </p:spPr>
+      </p:sp>
+      <p:sp>
+        <p:nvSpPr>
+          <p:cNvPr id="27" name="Shape 22"/>
+          <p:cNvSpPr/>
+          <p:nvPr/>
+        </p:nvSpPr>
+        <p:spPr>
+          <a:xfrm>
+            <a:off x="6518097" y="91440"/>
+            <a:ext cx="73152" cy="274320"/>
+          </a:xfrm>
+          <a:prstGeom prst="rect">
+            <a:avLst/>
+          </a:prstGeom>
+          <a:solidFill>
+            <a:srgbClr val="0369A1"/>
+          </a:solidFill>
+          <a:ln w="12700">
+            <a:solidFill>
+              <a:srgbClr val="0369A1"/>
+            </a:solidFill>
+            <a:prstDash val="solid"/>
+          </a:ln>
+        </p:spPr>
+      </p:sp>
+      <p:pic>
+        <p:nvPicPr>
+          <p:cNvPr id="28" name="Image 3" descr="preencoded.png">    </p:cNvPr>
+          <p:cNvPicPr>
+            <a:picLocks noChangeAspect="1"/>
+          </p:cNvPicPr>
+          <p:nvPr/>
+        </p:nvPicPr>
+        <p:blipFill>
+          <a:blip r:embed="rId4"/>
+          <a:stretch>
+            <a:fillRect/>
+          </a:stretch>
+        </p:blipFill>
+        <p:spPr>
+          <a:xfrm>
+            <a:off x="6646113" y="128016"/>
+            <a:ext cx="201168" cy="201168"/>
+          </a:xfrm>
+          <a:prstGeom prst="rect">
+            <a:avLst/>
+          </a:prstGeom>
+        </p:spPr>
+      </p:pic>
+      <p:sp>
+        <p:nvSpPr>
+          <p:cNvPr id="29" name="Text 23"/>
+          <p:cNvSpPr txBox="1"/>
+          <p:nvPr/>
+        </p:nvSpPr>
+        <p:spPr>
+          <a:xfrm>
+            <a:off x="6902145" y="91440"/>
+            <a:ext cx="1358900" cy="274320"/>
+          </a:xfrm>
+          <a:prstGeom prst="rect">
+            <a:avLst/>
+          </a:prstGeom>
+          <a:noFill/>
+          <a:ln/>
+        </p:spPr>
+        <p:txBody>
+          <a:bodyPr wrap="square" lIns="0" tIns="0" rIns="0" bIns="0" rtlCol="0" anchor="ctr"/>
+          <a:lstStyle/>
+          <a:p>
+            <a:pPr indent="0" marL="0">
+              <a:buNone/>
+            </a:pPr>
+            <a:r>
+              <a:rPr lang="en-US" sz="1100" b="1" dirty="0">
+                <a:solidFill>
+                  <a:srgbClr val="075985"/>
+                </a:solidFill>
+                <a:latin typeface="Calibri" pitchFamily="34" charset="0"/>
+                <a:ea typeface="Calibri" pitchFamily="34" charset="-122"/>
+                <a:cs typeface="Calibri" pitchFamily="34" charset="-120"/>
+              </a:rPr>
+              <a:t>UNDERSTAND NOW</a:t>
+            </a:r>
+            <a:endParaRPr lang="en-US" sz="1100" dirty="0"/>
+          </a:p>
+        </p:txBody>
+      </p:sp>
+      <p:sp>
+        <p:nvSpPr>
           <p:cNvPr id="25" name="Slide Number Placeholder 0"/>
           <p:cNvSpPr>
             <a:spLocks noGrp="1"/>
@@ -3991,6 +4422,133 @@
       </p:sp>
       <p:sp>
         <p:nvSpPr>
+          <p:cNvPr id="17" name="Shape 14"/>
+          <p:cNvSpPr/>
+          <p:nvPr/>
+        </p:nvSpPr>
+        <p:spPr>
+          <a:xfrm>
+            <a:off x="8616010" y="91440"/>
+            <a:ext cx="3027045" cy="274320"/>
+          </a:xfrm>
+          <a:prstGeom prst="rect">
+            <a:avLst/>
+          </a:prstGeom>
+          <a:solidFill>
+            <a:srgbClr val="E0F2FE"/>
+          </a:solidFill>
+          <a:ln w="12700">
+            <a:solidFill>
+              <a:srgbClr val="0369A1"/>
+            </a:solidFill>
+            <a:prstDash val="solid"/>
+          </a:ln>
+        </p:spPr>
+      </p:sp>
+      <p:sp>
+        <p:nvSpPr>
+          <p:cNvPr id="18" name="Shape 15"/>
+          <p:cNvSpPr/>
+          <p:nvPr/>
+        </p:nvSpPr>
+        <p:spPr>
+          <a:xfrm>
+            <a:off x="8616010" y="91440"/>
+            <a:ext cx="73152" cy="274320"/>
+          </a:xfrm>
+          <a:prstGeom prst="rect">
+            <a:avLst/>
+          </a:prstGeom>
+          <a:solidFill>
+            <a:srgbClr val="0369A1"/>
+          </a:solidFill>
+          <a:ln w="12700">
+            <a:solidFill>
+              <a:srgbClr val="0369A1"/>
+            </a:solidFill>
+            <a:prstDash val="solid"/>
+          </a:ln>
+        </p:spPr>
+      </p:sp>
+      <p:pic>
+        <p:nvPicPr>
+          <p:cNvPr id="19" name="Image 1" descr="preencoded.png">    </p:cNvPr>
+          <p:cNvPicPr>
+            <a:picLocks noChangeAspect="1"/>
+          </p:cNvPicPr>
+          <p:nvPr/>
+        </p:nvPicPr>
+        <p:blipFill>
+          <a:blip r:embed="rId2"/>
+          <a:stretch>
+            <a:fillRect/>
+          </a:stretch>
+        </p:blipFill>
+        <p:spPr>
+          <a:xfrm>
+            <a:off x="8744026" y="128016"/>
+            <a:ext cx="201168" cy="201168"/>
+          </a:xfrm>
+          <a:prstGeom prst="rect">
+            <a:avLst/>
+          </a:prstGeom>
+        </p:spPr>
+      </p:pic>
+      <p:sp>
+        <p:nvSpPr>
+          <p:cNvPr id="20" name="Text 16"/>
+          <p:cNvSpPr txBox="1"/>
+          <p:nvPr/>
+        </p:nvSpPr>
+        <p:spPr>
+          <a:xfrm>
+            <a:off x="9000058" y="91440"/>
+            <a:ext cx="2606421" cy="274320"/>
+          </a:xfrm>
+          <a:prstGeom prst="rect">
+            <a:avLst/>
+          </a:prstGeom>
+          <a:noFill/>
+          <a:ln/>
+        </p:spPr>
+        <p:txBody>
+          <a:bodyPr wrap="square" lIns="0" tIns="0" rIns="0" bIns="0" rtlCol="0" anchor="ctr"/>
+          <a:lstStyle/>
+          <a:p>
+            <a:pPr indent="0" marL="0">
+              <a:buNone/>
+            </a:pPr>
+            <a:r>
+              <a:rPr lang="en-US" sz="1100" b="1" dirty="0">
+                <a:solidFill>
+                  <a:srgbClr val="075985"/>
+                </a:solidFill>
+                <a:latin typeface="Calibri" pitchFamily="34" charset="0"/>
+                <a:ea typeface="Calibri" pitchFamily="34" charset="-122"/>
+                <a:cs typeface="Calibri" pitchFamily="34" charset="-120"/>
+              </a:rPr>
+              <a:t>UNDERSTAND NOW</a:t>
+            </a:r>
+            <a:pPr indent="0" marL="0">
+              <a:buNone/>
+            </a:pPr>
+            <a:r>
+              <a:rPr lang="en-US" sz="1100" dirty="0">
+                <a:solidFill>
+                  <a:srgbClr val="075985"/>
+                </a:solidFill>
+                <a:latin typeface="Calibri" pitchFamily="34" charset="0"/>
+                <a:ea typeface="Calibri" pitchFamily="34" charset="-122"/>
+                <a:cs typeface="Calibri" pitchFamily="34" charset="-120"/>
+              </a:rPr>
+              <a:t> · secondary memory</a:t>
+            </a:r>
+            <a:endParaRPr lang="en-US" sz="1100" dirty="0"/>
+          </a:p>
+        </p:txBody>
+      </p:sp>
+      <p:sp>
+        <p:nvSpPr>
           <p:cNvPr id="25" name="Slide Number Placeholder 0"/>
           <p:cNvSpPr>
             <a:spLocks noGrp="1"/>
@@ -4130,9 +4688,59 @@
           </a:ln>
         </p:spPr>
       </p:sp>
+      <p:sp>
+        <p:nvSpPr>
+          <p:cNvPr id="4" name="Shape 2"/>
+          <p:cNvSpPr/>
+          <p:nvPr/>
+        </p:nvSpPr>
+        <p:spPr>
+          <a:xfrm>
+            <a:off x="8616010" y="91440"/>
+            <a:ext cx="3027045" cy="274320"/>
+          </a:xfrm>
+          <a:prstGeom prst="rect">
+            <a:avLst/>
+          </a:prstGeom>
+          <a:solidFill>
+            <a:srgbClr val="E0F2FE"/>
+          </a:solidFill>
+          <a:ln w="12700">
+            <a:solidFill>
+              <a:srgbClr val="0369A1"/>
+            </a:solidFill>
+            <a:prstDash val="solid"/>
+          </a:ln>
+        </p:spPr>
+      </p:sp>
+      <p:sp>
+        <p:nvSpPr>
+          <p:cNvPr id="5" name="Shape 3"/>
+          <p:cNvSpPr/>
+          <p:nvPr/>
+        </p:nvSpPr>
+        <p:spPr>
+          <a:xfrm>
+            <a:off x="8616010" y="91440"/>
+            <a:ext cx="73152" cy="274320"/>
+          </a:xfrm>
+          <a:prstGeom prst="rect">
+            <a:avLst/>
+          </a:prstGeom>
+          <a:solidFill>
+            <a:srgbClr val="0369A1"/>
+          </a:solidFill>
+          <a:ln w="12700">
+            <a:solidFill>
+              <a:srgbClr val="0369A1"/>
+            </a:solidFill>
+            <a:prstDash val="solid"/>
+          </a:ln>
+        </p:spPr>
+      </p:sp>
       <p:pic>
         <p:nvPicPr>
-          <p:cNvPr id="5" name="Image 0" descr="preencoded.png">    </p:cNvPr>
+          <p:cNvPr id="6" name="Image 0" descr="preencoded.png">    </p:cNvPr>
           <p:cNvPicPr>
             <a:picLocks noChangeAspect="1"/>
           </p:cNvPicPr>
@@ -4146,6 +4754,83 @@
         </p:blipFill>
         <p:spPr>
           <a:xfrm>
+            <a:off x="8744026" y="128016"/>
+            <a:ext cx="201168" cy="201168"/>
+          </a:xfrm>
+          <a:prstGeom prst="rect">
+            <a:avLst/>
+          </a:prstGeom>
+        </p:spPr>
+      </p:pic>
+      <p:sp>
+        <p:nvSpPr>
+          <p:cNvPr id="7" name="Text 4"/>
+          <p:cNvSpPr txBox="1"/>
+          <p:nvPr/>
+        </p:nvSpPr>
+        <p:spPr>
+          <a:xfrm>
+            <a:off x="9000058" y="91440"/>
+            <a:ext cx="2606421" cy="274320"/>
+          </a:xfrm>
+          <a:prstGeom prst="rect">
+            <a:avLst/>
+          </a:prstGeom>
+          <a:noFill/>
+          <a:ln/>
+        </p:spPr>
+        <p:txBody>
+          <a:bodyPr wrap="square" lIns="0" tIns="0" rIns="0" bIns="0" rtlCol="0" anchor="ctr"/>
+          <a:lstStyle/>
+          <a:p>
+            <a:pPr indent="0" marL="0">
+              <a:buNone/>
+            </a:pPr>
+            <a:r>
+              <a:rPr lang="en-US" sz="1100" b="1" dirty="0">
+                <a:solidFill>
+                  <a:srgbClr val="075985"/>
+                </a:solidFill>
+                <a:latin typeface="Calibri" pitchFamily="34" charset="0"/>
+                <a:ea typeface="Calibri" pitchFamily="34" charset="-122"/>
+                <a:cs typeface="Calibri" pitchFamily="34" charset="-120"/>
+              </a:rPr>
+              <a:t>UNDERSTAND NOW</a:t>
+            </a:r>
+            <a:pPr indent="0" marL="0">
+              <a:buNone/>
+            </a:pPr>
+            <a:r>
+              <a:rPr lang="en-US" sz="1100" dirty="0">
+                <a:solidFill>
+                  <a:srgbClr val="075985"/>
+                </a:solidFill>
+                <a:latin typeface="Calibri" pitchFamily="34" charset="0"/>
+                <a:ea typeface="Calibri" pitchFamily="34" charset="-122"/>
+                <a:cs typeface="Calibri" pitchFamily="34" charset="-120"/>
+              </a:rPr>
+              <a:t> · secondary memory</a:t>
+            </a:r>
+            <a:endParaRPr lang="en-US" sz="1100" dirty="0"/>
+          </a:p>
+        </p:txBody>
+      </p:sp>
+      <p:pic>
+        <p:nvPicPr>
+          <p:cNvPr id="9" name="Image 1" descr="preencoded.png">    </p:cNvPr>
+          <p:cNvPicPr>
+            <a:picLocks noChangeAspect="1"/>
+          </p:cNvPicPr>
+          <p:nvPr/>
+        </p:nvPicPr>
+        <p:blipFill>
+          <a:blip r:embed="rId2"/>
+          <a:stretch>
+            <a:fillRect/>
+          </a:stretch>
+        </p:blipFill>
+        <p:spPr>
+          <a:xfrm>
             <a:off x="685800" y="1872610"/>
             <a:ext cx="4754880" cy="3844301"/>
           </a:xfrm>
@@ -4156,7 +4841,7 @@
       </p:pic>
       <p:sp>
         <p:nvSpPr>
-          <p:cNvPr id="6" name="Shape 2"/>
+          <p:cNvPr id="10" name="Shape 5"/>
           <p:cNvSpPr/>
           <p:nvPr/>
         </p:nvSpPr>
@@ -4181,7 +4866,7 @@
       </p:sp>
       <p:sp>
         <p:nvSpPr>
-          <p:cNvPr id="7" name="Text 3"/>
+          <p:cNvPr id="11" name="Text 6"/>
           <p:cNvSpPr txBox="1"/>
           <p:nvPr/>
         </p:nvSpPr>
@@ -4223,7 +4908,7 @@
       </p:sp>
       <p:sp>
         <p:nvSpPr>
-          <p:cNvPr id="8" name="Shape 4"/>
+          <p:cNvPr id="12" name="Shape 7"/>
           <p:cNvSpPr/>
           <p:nvPr/>
         </p:nvSpPr>
@@ -4248,7 +4933,7 @@
       </p:sp>
       <p:sp>
         <p:nvSpPr>
-          <p:cNvPr id="9" name="Text 5"/>
+          <p:cNvPr id="13" name="Text 8"/>
           <p:cNvSpPr txBox="1"/>
           <p:nvPr/>
         </p:nvSpPr>
@@ -4290,7 +4975,7 @@
       </p:sp>
       <p:sp>
         <p:nvSpPr>
-          <p:cNvPr id="10" name="Shape 6"/>
+          <p:cNvPr id="14" name="Shape 9"/>
           <p:cNvSpPr/>
           <p:nvPr/>
         </p:nvSpPr>
@@ -4315,7 +5000,7 @@
       </p:sp>
       <p:sp>
         <p:nvSpPr>
-          <p:cNvPr id="11" name="Text 7"/>
+          <p:cNvPr id="15" name="Text 10"/>
           <p:cNvSpPr txBox="1"/>
           <p:nvPr/>
         </p:nvSpPr>
@@ -4357,7 +5042,7 @@
       </p:sp>
       <p:sp>
         <p:nvSpPr>
-          <p:cNvPr id="12" name="Shape 8"/>
+          <p:cNvPr id="16" name="Shape 11"/>
           <p:cNvSpPr/>
           <p:nvPr/>
         </p:nvSpPr>
@@ -4382,7 +5067,7 @@
       </p:sp>
       <p:sp>
         <p:nvSpPr>
-          <p:cNvPr id="13" name="Text 9"/>
+          <p:cNvPr id="17" name="Text 12"/>
           <p:cNvSpPr txBox="1"/>
           <p:nvPr/>
         </p:nvSpPr>
@@ -4424,7 +5109,7 @@
       </p:sp>
       <p:sp>
         <p:nvSpPr>
-          <p:cNvPr id="14" name="Shape 10"/>
+          <p:cNvPr id="18" name="Shape 13"/>
           <p:cNvSpPr/>
           <p:nvPr/>
         </p:nvSpPr>
@@ -4449,7 +5134,7 @@
       </p:sp>
       <p:sp>
         <p:nvSpPr>
-          <p:cNvPr id="15" name="Text 11"/>
+          <p:cNvPr id="19" name="Text 14"/>
           <p:cNvSpPr txBox="1"/>
           <p:nvPr/>
         </p:nvSpPr>
@@ -5105,6 +5790,133 @@
       </p:sp>
       <p:sp>
         <p:nvSpPr>
+          <p:cNvPr id="16" name="Shape 14"/>
+          <p:cNvSpPr/>
+          <p:nvPr/>
+        </p:nvSpPr>
+        <p:spPr>
+          <a:xfrm>
+            <a:off x="8616010" y="91440"/>
+            <a:ext cx="3027045" cy="274320"/>
+          </a:xfrm>
+          <a:prstGeom prst="rect">
+            <a:avLst/>
+          </a:prstGeom>
+          <a:solidFill>
+            <a:srgbClr val="E0F2FE"/>
+          </a:solidFill>
+          <a:ln w="12700">
+            <a:solidFill>
+              <a:srgbClr val="0369A1"/>
+            </a:solidFill>
+            <a:prstDash val="solid"/>
+          </a:ln>
+        </p:spPr>
+      </p:sp>
+      <p:sp>
+        <p:nvSpPr>
+          <p:cNvPr id="17" name="Shape 15"/>
+          <p:cNvSpPr/>
+          <p:nvPr/>
+        </p:nvSpPr>
+        <p:spPr>
+          <a:xfrm>
+            <a:off x="8616010" y="91440"/>
+            <a:ext cx="73152" cy="274320"/>
+          </a:xfrm>
+          <a:prstGeom prst="rect">
+            <a:avLst/>
+          </a:prstGeom>
+          <a:solidFill>
+            <a:srgbClr val="0369A1"/>
+          </a:solidFill>
+          <a:ln w="12700">
+            <a:solidFill>
+              <a:srgbClr val="0369A1"/>
+            </a:solidFill>
+            <a:prstDash val="solid"/>
+          </a:ln>
+        </p:spPr>
+      </p:sp>
+      <p:pic>
+        <p:nvPicPr>
+          <p:cNvPr id="18" name="Image 0" descr="preencoded.png">    </p:cNvPr>
+          <p:cNvPicPr>
+            <a:picLocks noChangeAspect="1"/>
+          </p:cNvPicPr>
+          <p:nvPr/>
+        </p:nvPicPr>
+        <p:blipFill>
+          <a:blip r:embed="rId1"/>
+          <a:stretch>
+            <a:fillRect/>
+          </a:stretch>
+        </p:blipFill>
+        <p:spPr>
+          <a:xfrm>
+            <a:off x="8744026" y="128016"/>
+            <a:ext cx="201168" cy="201168"/>
+          </a:xfrm>
+          <a:prstGeom prst="rect">
+            <a:avLst/>
+          </a:prstGeom>
+        </p:spPr>
+      </p:pic>
+      <p:sp>
+        <p:nvSpPr>
+          <p:cNvPr id="19" name="Text 16"/>
+          <p:cNvSpPr txBox="1"/>
+          <p:nvPr/>
+        </p:nvSpPr>
+        <p:spPr>
+          <a:xfrm>
+            <a:off x="9000058" y="91440"/>
+            <a:ext cx="2606421" cy="274320"/>
+          </a:xfrm>
+          <a:prstGeom prst="rect">
+            <a:avLst/>
+          </a:prstGeom>
+          <a:noFill/>
+          <a:ln/>
+        </p:spPr>
+        <p:txBody>
+          <a:bodyPr wrap="square" lIns="0" tIns="0" rIns="0" bIns="0" rtlCol="0" anchor="ctr"/>
+          <a:lstStyle/>
+          <a:p>
+            <a:pPr indent="0" marL="0">
+              <a:buNone/>
+            </a:pPr>
+            <a:r>
+              <a:rPr lang="en-US" sz="1100" b="1" dirty="0">
+                <a:solidFill>
+                  <a:srgbClr val="075985"/>
+                </a:solidFill>
+                <a:latin typeface="Calibri" pitchFamily="34" charset="0"/>
+                <a:ea typeface="Calibri" pitchFamily="34" charset="-122"/>
+                <a:cs typeface="Calibri" pitchFamily="34" charset="-120"/>
+              </a:rPr>
+              <a:t>UNDERSTAND NOW</a:t>
+            </a:r>
+            <a:pPr indent="0" marL="0">
+              <a:buNone/>
+            </a:pPr>
+            <a:r>
+              <a:rPr lang="en-US" sz="1100" dirty="0">
+                <a:solidFill>
+                  <a:srgbClr val="075985"/>
+                </a:solidFill>
+                <a:latin typeface="Calibri" pitchFamily="34" charset="0"/>
+                <a:ea typeface="Calibri" pitchFamily="34" charset="-122"/>
+                <a:cs typeface="Calibri" pitchFamily="34" charset="-120"/>
+              </a:rPr>
+              <a:t> · secondary memory</a:t>
+            </a:r>
+            <a:endParaRPr lang="en-US" sz="1100" dirty="0"/>
+          </a:p>
+        </p:txBody>
+      </p:sp>
+      <p:sp>
+        <p:nvSpPr>
           <p:cNvPr id="25" name="Slide Number Placeholder 0"/>
           <p:cNvSpPr>
             <a:spLocks noGrp="1"/>
@@ -5579,6 +6391,133 @@
       </p:sp>
       <p:sp>
         <p:nvSpPr>
+          <p:cNvPr id="9" name="Shape 7"/>
+          <p:cNvSpPr/>
+          <p:nvPr/>
+        </p:nvSpPr>
+        <p:spPr>
+          <a:xfrm>
+            <a:off x="8616010" y="91440"/>
+            <a:ext cx="3027045" cy="274320"/>
+          </a:xfrm>
+          <a:prstGeom prst="rect">
+            <a:avLst/>
+          </a:prstGeom>
+          <a:solidFill>
+            <a:srgbClr val="E0F2FE"/>
+          </a:solidFill>
+          <a:ln w="12700">
+            <a:solidFill>
+              <a:srgbClr val="0369A1"/>
+            </a:solidFill>
+            <a:prstDash val="solid"/>
+          </a:ln>
+        </p:spPr>
+      </p:sp>
+      <p:sp>
+        <p:nvSpPr>
+          <p:cNvPr id="10" name="Shape 8"/>
+          <p:cNvSpPr/>
+          <p:nvPr/>
+        </p:nvSpPr>
+        <p:spPr>
+          <a:xfrm>
+            <a:off x="8616010" y="91440"/>
+            <a:ext cx="73152" cy="274320"/>
+          </a:xfrm>
+          <a:prstGeom prst="rect">
+            <a:avLst/>
+          </a:prstGeom>
+          <a:solidFill>
+            <a:srgbClr val="0369A1"/>
+          </a:solidFill>
+          <a:ln w="12700">
+            <a:solidFill>
+              <a:srgbClr val="0369A1"/>
+            </a:solidFill>
+            <a:prstDash val="solid"/>
+          </a:ln>
+        </p:spPr>
+      </p:sp>
+      <p:pic>
+        <p:nvPicPr>
+          <p:cNvPr id="11" name="Image 0" descr="preencoded.png">    </p:cNvPr>
+          <p:cNvPicPr>
+            <a:picLocks noChangeAspect="1"/>
+          </p:cNvPicPr>
+          <p:nvPr/>
+        </p:nvPicPr>
+        <p:blipFill>
+          <a:blip r:embed="rId1"/>
+          <a:stretch>
+            <a:fillRect/>
+          </a:stretch>
+        </p:blipFill>
+        <p:spPr>
+          <a:xfrm>
+            <a:off x="8744026" y="128016"/>
+            <a:ext cx="201168" cy="201168"/>
+          </a:xfrm>
+          <a:prstGeom prst="rect">
+            <a:avLst/>
+          </a:prstGeom>
+        </p:spPr>
+      </p:pic>
+      <p:sp>
+        <p:nvSpPr>
+          <p:cNvPr id="12" name="Text 9"/>
+          <p:cNvSpPr txBox="1"/>
+          <p:nvPr/>
+        </p:nvSpPr>
+        <p:spPr>
+          <a:xfrm>
+            <a:off x="9000058" y="91440"/>
+            <a:ext cx="2606421" cy="274320"/>
+          </a:xfrm>
+          <a:prstGeom prst="rect">
+            <a:avLst/>
+          </a:prstGeom>
+          <a:noFill/>
+          <a:ln/>
+        </p:spPr>
+        <p:txBody>
+          <a:bodyPr wrap="square" lIns="0" tIns="0" rIns="0" bIns="0" rtlCol="0" anchor="ctr"/>
+          <a:lstStyle/>
+          <a:p>
+            <a:pPr indent="0" marL="0">
+              <a:buNone/>
+            </a:pPr>
+            <a:r>
+              <a:rPr lang="en-US" sz="1100" b="1" dirty="0">
+                <a:solidFill>
+                  <a:srgbClr val="075985"/>
+                </a:solidFill>
+                <a:latin typeface="Calibri" pitchFamily="34" charset="0"/>
+                <a:ea typeface="Calibri" pitchFamily="34" charset="-122"/>
+                <a:cs typeface="Calibri" pitchFamily="34" charset="-120"/>
+              </a:rPr>
+              <a:t>UNDERSTAND NOW</a:t>
+            </a:r>
+            <a:pPr indent="0" marL="0">
+              <a:buNone/>
+            </a:pPr>
+            <a:r>
+              <a:rPr lang="en-US" sz="1100" dirty="0">
+                <a:solidFill>
+                  <a:srgbClr val="075985"/>
+                </a:solidFill>
+                <a:latin typeface="Calibri" pitchFamily="34" charset="0"/>
+                <a:ea typeface="Calibri" pitchFamily="34" charset="-122"/>
+                <a:cs typeface="Calibri" pitchFamily="34" charset="-120"/>
+              </a:rPr>
+              <a:t> · secondary memory</a:t>
+            </a:r>
+            <a:endParaRPr lang="en-US" sz="1100" dirty="0"/>
+          </a:p>
+        </p:txBody>
+      </p:sp>
+      <p:sp>
+        <p:nvSpPr>
           <p:cNvPr id="25" name="Slide Number Placeholder 0"/>
           <p:cNvSpPr>
             <a:spLocks noGrp="1"/>
@@ -6064,6 +7003,133 @@
       </p:sp>
       <p:sp>
         <p:nvSpPr>
+          <p:cNvPr id="13" name="Shape 10"/>
+          <p:cNvSpPr/>
+          <p:nvPr/>
+        </p:nvSpPr>
+        <p:spPr>
+          <a:xfrm>
+            <a:off x="8616010" y="91440"/>
+            <a:ext cx="3027045" cy="274320"/>
+          </a:xfrm>
+          <a:prstGeom prst="rect">
+            <a:avLst/>
+          </a:prstGeom>
+          <a:solidFill>
+            <a:srgbClr val="E0F2FE"/>
+          </a:solidFill>
+          <a:ln w="12700">
+            <a:solidFill>
+              <a:srgbClr val="0369A1"/>
+            </a:solidFill>
+            <a:prstDash val="solid"/>
+          </a:ln>
+        </p:spPr>
+      </p:sp>
+      <p:sp>
+        <p:nvSpPr>
+          <p:cNvPr id="14" name="Shape 11"/>
+          <p:cNvSpPr/>
+          <p:nvPr/>
+        </p:nvSpPr>
+        <p:spPr>
+          <a:xfrm>
+            <a:off x="8616010" y="91440"/>
+            <a:ext cx="73152" cy="274320"/>
+          </a:xfrm>
+          <a:prstGeom prst="rect">
+            <a:avLst/>
+          </a:prstGeom>
+          <a:solidFill>
+            <a:srgbClr val="0369A1"/>
+          </a:solidFill>
+          <a:ln w="12700">
+            <a:solidFill>
+              <a:srgbClr val="0369A1"/>
+            </a:solidFill>
+            <a:prstDash val="solid"/>
+          </a:ln>
+        </p:spPr>
+      </p:sp>
+      <p:pic>
+        <p:nvPicPr>
+          <p:cNvPr id="15" name="Image 1" descr="preencoded.png">    </p:cNvPr>
+          <p:cNvPicPr>
+            <a:picLocks noChangeAspect="1"/>
+          </p:cNvPicPr>
+          <p:nvPr/>
+        </p:nvPicPr>
+        <p:blipFill>
+          <a:blip r:embed="rId2"/>
+          <a:stretch>
+            <a:fillRect/>
+          </a:stretch>
+        </p:blipFill>
+        <p:spPr>
+          <a:xfrm>
+            <a:off x="8744026" y="128016"/>
+            <a:ext cx="201168" cy="201168"/>
+          </a:xfrm>
+          <a:prstGeom prst="rect">
+            <a:avLst/>
+          </a:prstGeom>
+        </p:spPr>
+      </p:pic>
+      <p:sp>
+        <p:nvSpPr>
+          <p:cNvPr id="16" name="Text 12"/>
+          <p:cNvSpPr txBox="1"/>
+          <p:nvPr/>
+        </p:nvSpPr>
+        <p:spPr>
+          <a:xfrm>
+            <a:off x="9000058" y="91440"/>
+            <a:ext cx="2606421" cy="274320"/>
+          </a:xfrm>
+          <a:prstGeom prst="rect">
+            <a:avLst/>
+          </a:prstGeom>
+          <a:noFill/>
+          <a:ln/>
+        </p:spPr>
+        <p:txBody>
+          <a:bodyPr wrap="square" lIns="0" tIns="0" rIns="0" bIns="0" rtlCol="0" anchor="ctr"/>
+          <a:lstStyle/>
+          <a:p>
+            <a:pPr indent="0" marL="0">
+              <a:buNone/>
+            </a:pPr>
+            <a:r>
+              <a:rPr lang="en-US" sz="1100" b="1" dirty="0">
+                <a:solidFill>
+                  <a:srgbClr val="075985"/>
+                </a:solidFill>
+                <a:latin typeface="Calibri" pitchFamily="34" charset="0"/>
+                <a:ea typeface="Calibri" pitchFamily="34" charset="-122"/>
+                <a:cs typeface="Calibri" pitchFamily="34" charset="-120"/>
+              </a:rPr>
+              <a:t>UNDERSTAND NOW</a:t>
+            </a:r>
+            <a:pPr indent="0" marL="0">
+              <a:buNone/>
+            </a:pPr>
+            <a:r>
+              <a:rPr lang="en-US" sz="1100" dirty="0">
+                <a:solidFill>
+                  <a:srgbClr val="075985"/>
+                </a:solidFill>
+                <a:latin typeface="Calibri" pitchFamily="34" charset="0"/>
+                <a:ea typeface="Calibri" pitchFamily="34" charset="-122"/>
+                <a:cs typeface="Calibri" pitchFamily="34" charset="-120"/>
+              </a:rPr>
+              <a:t> · secondary memory</a:t>
+            </a:r>
+            <a:endParaRPr lang="en-US" sz="1100" dirty="0"/>
+          </a:p>
+        </p:txBody>
+      </p:sp>
+      <p:sp>
+        <p:nvSpPr>
           <p:cNvPr id="25" name="Slide Number Placeholder 0"/>
           <p:cNvSpPr>
             <a:spLocks noGrp="1"/>
@@ -6616,6 +7682,133 @@
       </p:sp>
       <p:sp>
         <p:nvSpPr>
+          <p:cNvPr id="15" name="Shape 12"/>
+          <p:cNvSpPr/>
+          <p:nvPr/>
+        </p:nvSpPr>
+        <p:spPr>
+          <a:xfrm>
+            <a:off x="8616010" y="91440"/>
+            <a:ext cx="3027045" cy="274320"/>
+          </a:xfrm>
+          <a:prstGeom prst="rect">
+            <a:avLst/>
+          </a:prstGeom>
+          <a:solidFill>
+            <a:srgbClr val="E0F2FE"/>
+          </a:solidFill>
+          <a:ln w="12700">
+            <a:solidFill>
+              <a:srgbClr val="0369A1"/>
+            </a:solidFill>
+            <a:prstDash val="solid"/>
+          </a:ln>
+        </p:spPr>
+      </p:sp>
+      <p:sp>
+        <p:nvSpPr>
+          <p:cNvPr id="16" name="Shape 13"/>
+          <p:cNvSpPr/>
+          <p:nvPr/>
+        </p:nvSpPr>
+        <p:spPr>
+          <a:xfrm>
+            <a:off x="8616010" y="91440"/>
+            <a:ext cx="73152" cy="274320"/>
+          </a:xfrm>
+          <a:prstGeom prst="rect">
+            <a:avLst/>
+          </a:prstGeom>
+          <a:solidFill>
+            <a:srgbClr val="0369A1"/>
+          </a:solidFill>
+          <a:ln w="12700">
+            <a:solidFill>
+              <a:srgbClr val="0369A1"/>
+            </a:solidFill>
+            <a:prstDash val="solid"/>
+          </a:ln>
+        </p:spPr>
+      </p:sp>
+      <p:pic>
+        <p:nvPicPr>
+          <p:cNvPr id="17" name="Image 1" descr="preencoded.png">    </p:cNvPr>
+          <p:cNvPicPr>
+            <a:picLocks noChangeAspect="1"/>
+          </p:cNvPicPr>
+          <p:nvPr/>
+        </p:nvPicPr>
+        <p:blipFill>
+          <a:blip r:embed="rId2"/>
+          <a:stretch>
+            <a:fillRect/>
+          </a:stretch>
+        </p:blipFill>
+        <p:spPr>
+          <a:xfrm>
+            <a:off x="8744026" y="128016"/>
+            <a:ext cx="201168" cy="201168"/>
+          </a:xfrm>
+          <a:prstGeom prst="rect">
+            <a:avLst/>
+          </a:prstGeom>
+        </p:spPr>
+      </p:pic>
+      <p:sp>
+        <p:nvSpPr>
+          <p:cNvPr id="18" name="Text 14"/>
+          <p:cNvSpPr txBox="1"/>
+          <p:nvPr/>
+        </p:nvSpPr>
+        <p:spPr>
+          <a:xfrm>
+            <a:off x="9000058" y="91440"/>
+            <a:ext cx="2606421" cy="274320"/>
+          </a:xfrm>
+          <a:prstGeom prst="rect">
+            <a:avLst/>
+          </a:prstGeom>
+          <a:noFill/>
+          <a:ln/>
+        </p:spPr>
+        <p:txBody>
+          <a:bodyPr wrap="square" lIns="0" tIns="0" rIns="0" bIns="0" rtlCol="0" anchor="ctr"/>
+          <a:lstStyle/>
+          <a:p>
+            <a:pPr indent="0" marL="0">
+              <a:buNone/>
+            </a:pPr>
+            <a:r>
+              <a:rPr lang="en-US" sz="1100" b="1" dirty="0">
+                <a:solidFill>
+                  <a:srgbClr val="075985"/>
+                </a:solidFill>
+                <a:latin typeface="Calibri" pitchFamily="34" charset="0"/>
+                <a:ea typeface="Calibri" pitchFamily="34" charset="-122"/>
+                <a:cs typeface="Calibri" pitchFamily="34" charset="-120"/>
+              </a:rPr>
+              <a:t>UNDERSTAND NOW</a:t>
+            </a:r>
+            <a:pPr indent="0" marL="0">
+              <a:buNone/>
+            </a:pPr>
+            <a:r>
+              <a:rPr lang="en-US" sz="1100" dirty="0">
+                <a:solidFill>
+                  <a:srgbClr val="075985"/>
+                </a:solidFill>
+                <a:latin typeface="Calibri" pitchFamily="34" charset="0"/>
+                <a:ea typeface="Calibri" pitchFamily="34" charset="-122"/>
+                <a:cs typeface="Calibri" pitchFamily="34" charset="-120"/>
+              </a:rPr>
+              <a:t> · secondary memory</a:t>
+            </a:r>
+            <a:endParaRPr lang="en-US" sz="1100" dirty="0"/>
+          </a:p>
+        </p:txBody>
+      </p:sp>
+      <p:sp>
+        <p:nvSpPr>
           <p:cNvPr id="25" name="Slide Number Placeholder 0"/>
           <p:cNvSpPr>
             <a:spLocks noGrp="1"/>
@@ -7456,6 +8649,133 @@
               <a:t>A modern computing system has several levels of permanent memory, often managed automatically: data that are used often migrate towards the fast levels, the rest sinks towards the cheap ones.</a:t>
             </a:r>
             <a:endParaRPr lang="en-US" sz="2000" dirty="0"/>
+          </a:p>
+        </p:txBody>
+      </p:sp>
+      <p:sp>
+        <p:nvSpPr>
+          <p:cNvPr id="24" name="Shape 22"/>
+          <p:cNvSpPr/>
+          <p:nvPr/>
+        </p:nvSpPr>
+        <p:spPr>
+          <a:xfrm>
+            <a:off x="8616010" y="91440"/>
+            <a:ext cx="3027045" cy="274320"/>
+          </a:xfrm>
+          <a:prstGeom prst="rect">
+            <a:avLst/>
+          </a:prstGeom>
+          <a:solidFill>
+            <a:srgbClr val="E0F2FE"/>
+          </a:solidFill>
+          <a:ln w="12700">
+            <a:solidFill>
+              <a:srgbClr val="0369A1"/>
+            </a:solidFill>
+            <a:prstDash val="solid"/>
+          </a:ln>
+        </p:spPr>
+      </p:sp>
+      <p:sp>
+        <p:nvSpPr>
+          <p:cNvPr id="25" name="Shape 23"/>
+          <p:cNvSpPr/>
+          <p:nvPr/>
+        </p:nvSpPr>
+        <p:spPr>
+          <a:xfrm>
+            <a:off x="8616010" y="91440"/>
+            <a:ext cx="73152" cy="274320"/>
+          </a:xfrm>
+          <a:prstGeom prst="rect">
+            <a:avLst/>
+          </a:prstGeom>
+          <a:solidFill>
+            <a:srgbClr val="0369A1"/>
+          </a:solidFill>
+          <a:ln w="12700">
+            <a:solidFill>
+              <a:srgbClr val="0369A1"/>
+            </a:solidFill>
+            <a:prstDash val="solid"/>
+          </a:ln>
+        </p:spPr>
+      </p:sp>
+      <p:pic>
+        <p:nvPicPr>
+          <p:cNvPr id="26" name="Image 0" descr="preencoded.png">    </p:cNvPr>
+          <p:cNvPicPr>
+            <a:picLocks noChangeAspect="1"/>
+          </p:cNvPicPr>
+          <p:nvPr/>
+        </p:nvPicPr>
+        <p:blipFill>
+          <a:blip r:embed="rId1"/>
+          <a:stretch>
+            <a:fillRect/>
+          </a:stretch>
+        </p:blipFill>
+        <p:spPr>
+          <a:xfrm>
+            <a:off x="8744026" y="128016"/>
+            <a:ext cx="201168" cy="201168"/>
+          </a:xfrm>
+          <a:prstGeom prst="rect">
+            <a:avLst/>
+          </a:prstGeom>
+        </p:spPr>
+      </p:pic>
+      <p:sp>
+        <p:nvSpPr>
+          <p:cNvPr id="27" name="Text 24"/>
+          <p:cNvSpPr txBox="1"/>
+          <p:nvPr/>
+        </p:nvSpPr>
+        <p:spPr>
+          <a:xfrm>
+            <a:off x="9000058" y="91440"/>
+            <a:ext cx="2606421" cy="274320"/>
+          </a:xfrm>
+          <a:prstGeom prst="rect">
+            <a:avLst/>
+          </a:prstGeom>
+          <a:noFill/>
+          <a:ln/>
+        </p:spPr>
+        <p:txBody>
+          <a:bodyPr wrap="square" lIns="0" tIns="0" rIns="0" bIns="0" rtlCol="0" anchor="ctr"/>
+          <a:lstStyle/>
+          <a:p>
+            <a:pPr indent="0" marL="0">
+              <a:buNone/>
+            </a:pPr>
+            <a:r>
+              <a:rPr lang="en-US" sz="1100" b="1" dirty="0">
+                <a:solidFill>
+                  <a:srgbClr val="075985"/>
+                </a:solidFill>
+                <a:latin typeface="Calibri" pitchFamily="34" charset="0"/>
+                <a:ea typeface="Calibri" pitchFamily="34" charset="-122"/>
+                <a:cs typeface="Calibri" pitchFamily="34" charset="-120"/>
+              </a:rPr>
+              <a:t>UNDERSTAND NOW</a:t>
+            </a:r>
+            <a:pPr indent="0" marL="0">
+              <a:buNone/>
+            </a:pPr>
+            <a:r>
+              <a:rPr lang="en-US" sz="1100" dirty="0">
+                <a:solidFill>
+                  <a:srgbClr val="075985"/>
+                </a:solidFill>
+                <a:latin typeface="Calibri" pitchFamily="34" charset="0"/>
+                <a:ea typeface="Calibri" pitchFamily="34" charset="-122"/>
+                <a:cs typeface="Calibri" pitchFamily="34" charset="-120"/>
+              </a:rPr>
+              <a:t> · secondary memory</a:t>
+            </a:r>
+            <a:endParaRPr lang="en-US" sz="1100" dirty="0"/>
           </a:p>
         </p:txBody>
       </p:sp>
@@ -13881,6 +15201,133 @@
       </p:sp>
       <p:sp>
         <p:nvSpPr>
+          <p:cNvPr id="27" name="Shape 25"/>
+          <p:cNvSpPr/>
+          <p:nvPr/>
+        </p:nvSpPr>
+        <p:spPr>
+          <a:xfrm>
+            <a:off x="7828102" y="91440"/>
+            <a:ext cx="3814953" cy="274320"/>
+          </a:xfrm>
+          <a:prstGeom prst="rect">
+            <a:avLst/>
+          </a:prstGeom>
+          <a:solidFill>
+            <a:srgbClr val="E0F2FE"/>
+          </a:solidFill>
+          <a:ln w="12700">
+            <a:solidFill>
+              <a:srgbClr val="0369A1"/>
+            </a:solidFill>
+            <a:prstDash val="solid"/>
+          </a:ln>
+        </p:spPr>
+      </p:sp>
+      <p:sp>
+        <p:nvSpPr>
+          <p:cNvPr id="28" name="Shape 26"/>
+          <p:cNvSpPr/>
+          <p:nvPr/>
+        </p:nvSpPr>
+        <p:spPr>
+          <a:xfrm>
+            <a:off x="7828102" y="91440"/>
+            <a:ext cx="73152" cy="274320"/>
+          </a:xfrm>
+          <a:prstGeom prst="rect">
+            <a:avLst/>
+          </a:prstGeom>
+          <a:solidFill>
+            <a:srgbClr val="0369A1"/>
+          </a:solidFill>
+          <a:ln w="12700">
+            <a:solidFill>
+              <a:srgbClr val="0369A1"/>
+            </a:solidFill>
+            <a:prstDash val="solid"/>
+          </a:ln>
+        </p:spPr>
+      </p:sp>
+      <p:pic>
+        <p:nvPicPr>
+          <p:cNvPr id="29" name="Image 0" descr="preencoded.png">    </p:cNvPr>
+          <p:cNvPicPr>
+            <a:picLocks noChangeAspect="1"/>
+          </p:cNvPicPr>
+          <p:nvPr/>
+        </p:nvPicPr>
+        <p:blipFill>
+          <a:blip r:embed="rId1"/>
+          <a:stretch>
+            <a:fillRect/>
+          </a:stretch>
+        </p:blipFill>
+        <p:spPr>
+          <a:xfrm>
+            <a:off x="7956118" y="128016"/>
+            <a:ext cx="201168" cy="201168"/>
+          </a:xfrm>
+          <a:prstGeom prst="rect">
+            <a:avLst/>
+          </a:prstGeom>
+        </p:spPr>
+      </p:pic>
+      <p:sp>
+        <p:nvSpPr>
+          <p:cNvPr id="30" name="Text 27"/>
+          <p:cNvSpPr txBox="1"/>
+          <p:nvPr/>
+        </p:nvSpPr>
+        <p:spPr>
+          <a:xfrm>
+            <a:off x="8212150" y="91440"/>
+            <a:ext cx="3394329" cy="274320"/>
+          </a:xfrm>
+          <a:prstGeom prst="rect">
+            <a:avLst/>
+          </a:prstGeom>
+          <a:noFill/>
+          <a:ln/>
+        </p:spPr>
+        <p:txBody>
+          <a:bodyPr wrap="square" lIns="0" tIns="0" rIns="0" bIns="0" rtlCol="0" anchor="ctr"/>
+          <a:lstStyle/>
+          <a:p>
+            <a:pPr indent="0" marL="0">
+              <a:buNone/>
+            </a:pPr>
+            <a:r>
+              <a:rPr lang="en-US" sz="1100" b="1" dirty="0">
+                <a:solidFill>
+                  <a:srgbClr val="075985"/>
+                </a:solidFill>
+                <a:latin typeface="Calibri" pitchFamily="34" charset="0"/>
+                <a:ea typeface="Calibri" pitchFamily="34" charset="-122"/>
+                <a:cs typeface="Calibri" pitchFamily="34" charset="-120"/>
+              </a:rPr>
+              <a:t>UNDERSTAND NOW</a:t>
+            </a:r>
+            <a:pPr indent="0" marL="0">
+              <a:buNone/>
+            </a:pPr>
+            <a:r>
+              <a:rPr lang="en-US" sz="1100" dirty="0">
+                <a:solidFill>
+                  <a:srgbClr val="075985"/>
+                </a:solidFill>
+                <a:latin typeface="Calibri" pitchFamily="34" charset="0"/>
+                <a:ea typeface="Calibri" pitchFamily="34" charset="-122"/>
+                <a:cs typeface="Calibri" pitchFamily="34" charset="-120"/>
+              </a:rPr>
+              <a:t> · the von Neumann architecture</a:t>
+            </a:r>
+            <a:endParaRPr lang="en-US" sz="1100" dirty="0"/>
+          </a:p>
+        </p:txBody>
+      </p:sp>
+      <p:sp>
+        <p:nvSpPr>
           <p:cNvPr id="25" name="Slide Number Placeholder 0"/>
           <p:cNvSpPr>
             <a:spLocks noGrp="1"/>
@@ -14443,6 +15890,133 @@
               <a:t>from the first instruction after reset to your program, through layers of permanent memory</a:t>
             </a:r>
             <a:endParaRPr lang="en-US" sz="1900" dirty="0"/>
+          </a:p>
+        </p:txBody>
+      </p:sp>
+      <p:sp>
+        <p:nvSpPr>
+          <p:cNvPr id="14" name="Shape 12"/>
+          <p:cNvSpPr/>
+          <p:nvPr/>
+        </p:nvSpPr>
+        <p:spPr>
+          <a:xfrm>
+            <a:off x="8353374" y="91440"/>
+            <a:ext cx="3289681" cy="274320"/>
+          </a:xfrm>
+          <a:prstGeom prst="rect">
+            <a:avLst/>
+          </a:prstGeom>
+          <a:solidFill>
+            <a:srgbClr val="E0F2FE"/>
+          </a:solidFill>
+          <a:ln w="12700">
+            <a:solidFill>
+              <a:srgbClr val="0369A1"/>
+            </a:solidFill>
+            <a:prstDash val="solid"/>
+          </a:ln>
+        </p:spPr>
+      </p:sp>
+      <p:sp>
+        <p:nvSpPr>
+          <p:cNvPr id="15" name="Shape 13"/>
+          <p:cNvSpPr/>
+          <p:nvPr/>
+        </p:nvSpPr>
+        <p:spPr>
+          <a:xfrm>
+            <a:off x="8353374" y="91440"/>
+            <a:ext cx="73152" cy="274320"/>
+          </a:xfrm>
+          <a:prstGeom prst="rect">
+            <a:avLst/>
+          </a:prstGeom>
+          <a:solidFill>
+            <a:srgbClr val="0369A1"/>
+          </a:solidFill>
+          <a:ln w="12700">
+            <a:solidFill>
+              <a:srgbClr val="0369A1"/>
+            </a:solidFill>
+            <a:prstDash val="solid"/>
+          </a:ln>
+        </p:spPr>
+      </p:sp>
+      <p:pic>
+        <p:nvPicPr>
+          <p:cNvPr id="16" name="Image 0" descr="preencoded.png">    </p:cNvPr>
+          <p:cNvPicPr>
+            <a:picLocks noChangeAspect="1"/>
+          </p:cNvPicPr>
+          <p:nvPr/>
+        </p:nvPicPr>
+        <p:blipFill>
+          <a:blip r:embed="rId1"/>
+          <a:stretch>
+            <a:fillRect/>
+          </a:stretch>
+        </p:blipFill>
+        <p:spPr>
+          <a:xfrm>
+            <a:off x="8481390" y="128016"/>
+            <a:ext cx="201168" cy="201168"/>
+          </a:xfrm>
+          <a:prstGeom prst="rect">
+            <a:avLst/>
+          </a:prstGeom>
+        </p:spPr>
+      </p:pic>
+      <p:sp>
+        <p:nvSpPr>
+          <p:cNvPr id="17" name="Text 14"/>
+          <p:cNvSpPr txBox="1"/>
+          <p:nvPr/>
+        </p:nvSpPr>
+        <p:spPr>
+          <a:xfrm>
+            <a:off x="8737422" y="91440"/>
+            <a:ext cx="2869057" cy="274320"/>
+          </a:xfrm>
+          <a:prstGeom prst="rect">
+            <a:avLst/>
+          </a:prstGeom>
+          <a:noFill/>
+          <a:ln/>
+        </p:spPr>
+        <p:txBody>
+          <a:bodyPr wrap="square" lIns="0" tIns="0" rIns="0" bIns="0" rtlCol="0" anchor="ctr"/>
+          <a:lstStyle/>
+          <a:p>
+            <a:pPr indent="0" marL="0">
+              <a:buNone/>
+            </a:pPr>
+            <a:r>
+              <a:rPr lang="en-US" sz="1100" b="1" dirty="0">
+                <a:solidFill>
+                  <a:srgbClr val="075985"/>
+                </a:solidFill>
+                <a:latin typeface="Calibri" pitchFamily="34" charset="0"/>
+                <a:ea typeface="Calibri" pitchFamily="34" charset="-122"/>
+                <a:cs typeface="Calibri" pitchFamily="34" charset="-120"/>
+              </a:rPr>
+              <a:t>UNDERSTAND NOW</a:t>
+            </a:r>
+            <a:pPr indent="0" marL="0">
+              <a:buNone/>
+            </a:pPr>
+            <a:r>
+              <a:rPr lang="en-US" sz="1100" dirty="0">
+                <a:solidFill>
+                  <a:srgbClr val="075985"/>
+                </a:solidFill>
+                <a:latin typeface="Calibri" pitchFamily="34" charset="0"/>
+                <a:ea typeface="Calibri" pitchFamily="34" charset="-122"/>
+                <a:cs typeface="Calibri" pitchFamily="34" charset="-120"/>
+              </a:rPr>
+              <a:t> · ROM, flash, firmware</a:t>
+            </a:r>
+            <a:endParaRPr lang="en-US" sz="1100" dirty="0"/>
           </a:p>
         </p:txBody>
       </p:sp>
@@ -16238,6 +17812,133 @@
       </p:graphicFrame>
       <p:sp>
         <p:nvSpPr>
+          <p:cNvPr id="4" name="Shape 1"/>
+          <p:cNvSpPr/>
+          <p:nvPr/>
+        </p:nvSpPr>
+        <p:spPr>
+          <a:xfrm>
+            <a:off x="8353374" y="91440"/>
+            <a:ext cx="3289681" cy="274320"/>
+          </a:xfrm>
+          <a:prstGeom prst="rect">
+            <a:avLst/>
+          </a:prstGeom>
+          <a:solidFill>
+            <a:srgbClr val="E0F2FE"/>
+          </a:solidFill>
+          <a:ln w="12700">
+            <a:solidFill>
+              <a:srgbClr val="0369A1"/>
+            </a:solidFill>
+            <a:prstDash val="solid"/>
+          </a:ln>
+        </p:spPr>
+      </p:sp>
+      <p:sp>
+        <p:nvSpPr>
+          <p:cNvPr id="5" name="Shape 2"/>
+          <p:cNvSpPr/>
+          <p:nvPr/>
+        </p:nvSpPr>
+        <p:spPr>
+          <a:xfrm>
+            <a:off x="8353374" y="91440"/>
+            <a:ext cx="73152" cy="274320"/>
+          </a:xfrm>
+          <a:prstGeom prst="rect">
+            <a:avLst/>
+          </a:prstGeom>
+          <a:solidFill>
+            <a:srgbClr val="0369A1"/>
+          </a:solidFill>
+          <a:ln w="12700">
+            <a:solidFill>
+              <a:srgbClr val="0369A1"/>
+            </a:solidFill>
+            <a:prstDash val="solid"/>
+          </a:ln>
+        </p:spPr>
+      </p:sp>
+      <p:pic>
+        <p:nvPicPr>
+          <p:cNvPr id="6" name="Image 0" descr="preencoded.png">    </p:cNvPr>
+          <p:cNvPicPr>
+            <a:picLocks noChangeAspect="1"/>
+          </p:cNvPicPr>
+          <p:nvPr/>
+        </p:nvPicPr>
+        <p:blipFill>
+          <a:blip r:embed="rId1"/>
+          <a:stretch>
+            <a:fillRect/>
+          </a:stretch>
+        </p:blipFill>
+        <p:spPr>
+          <a:xfrm>
+            <a:off x="8481390" y="128016"/>
+            <a:ext cx="201168" cy="201168"/>
+          </a:xfrm>
+          <a:prstGeom prst="rect">
+            <a:avLst/>
+          </a:prstGeom>
+        </p:spPr>
+      </p:pic>
+      <p:sp>
+        <p:nvSpPr>
+          <p:cNvPr id="7" name="Text 3"/>
+          <p:cNvSpPr txBox="1"/>
+          <p:nvPr/>
+        </p:nvSpPr>
+        <p:spPr>
+          <a:xfrm>
+            <a:off x="8737422" y="91440"/>
+            <a:ext cx="2869057" cy="274320"/>
+          </a:xfrm>
+          <a:prstGeom prst="rect">
+            <a:avLst/>
+          </a:prstGeom>
+          <a:noFill/>
+          <a:ln/>
+        </p:spPr>
+        <p:txBody>
+          <a:bodyPr wrap="square" lIns="0" tIns="0" rIns="0" bIns="0" rtlCol="0" anchor="ctr"/>
+          <a:lstStyle/>
+          <a:p>
+            <a:pPr indent="0" marL="0">
+              <a:buNone/>
+            </a:pPr>
+            <a:r>
+              <a:rPr lang="en-US" sz="1100" b="1" dirty="0">
+                <a:solidFill>
+                  <a:srgbClr val="075985"/>
+                </a:solidFill>
+                <a:latin typeface="Calibri" pitchFamily="34" charset="0"/>
+                <a:ea typeface="Calibri" pitchFamily="34" charset="-122"/>
+                <a:cs typeface="Calibri" pitchFamily="34" charset="-120"/>
+              </a:rPr>
+              <a:t>UNDERSTAND NOW</a:t>
+            </a:r>
+            <a:pPr indent="0" marL="0">
+              <a:buNone/>
+            </a:pPr>
+            <a:r>
+              <a:rPr lang="en-US" sz="1100" dirty="0">
+                <a:solidFill>
+                  <a:srgbClr val="075985"/>
+                </a:solidFill>
+                <a:latin typeface="Calibri" pitchFamily="34" charset="0"/>
+                <a:ea typeface="Calibri" pitchFamily="34" charset="-122"/>
+                <a:cs typeface="Calibri" pitchFamily="34" charset="-120"/>
+              </a:rPr>
+              <a:t> · ROM, flash, firmware</a:t>
+            </a:r>
+            <a:endParaRPr lang="en-US" sz="1100" dirty="0"/>
+          </a:p>
+        </p:txBody>
+      </p:sp>
+      <p:sp>
+        <p:nvSpPr>
           <p:cNvPr id="25" name="Slide Number Placeholder 0"/>
           <p:cNvSpPr>
             <a:spLocks noGrp="1"/>
@@ -16750,6 +18451,133 @@
       </p:sp>
       <p:sp>
         <p:nvSpPr>
+          <p:cNvPr id="15" name="Shape 12"/>
+          <p:cNvSpPr/>
+          <p:nvPr/>
+        </p:nvSpPr>
+        <p:spPr>
+          <a:xfrm>
+            <a:off x="8353374" y="91440"/>
+            <a:ext cx="3289681" cy="274320"/>
+          </a:xfrm>
+          <a:prstGeom prst="rect">
+            <a:avLst/>
+          </a:prstGeom>
+          <a:solidFill>
+            <a:srgbClr val="E0F2FE"/>
+          </a:solidFill>
+          <a:ln w="12700">
+            <a:solidFill>
+              <a:srgbClr val="0369A1"/>
+            </a:solidFill>
+            <a:prstDash val="solid"/>
+          </a:ln>
+        </p:spPr>
+      </p:sp>
+      <p:sp>
+        <p:nvSpPr>
+          <p:cNvPr id="16" name="Shape 13"/>
+          <p:cNvSpPr/>
+          <p:nvPr/>
+        </p:nvSpPr>
+        <p:spPr>
+          <a:xfrm>
+            <a:off x="8353374" y="91440"/>
+            <a:ext cx="73152" cy="274320"/>
+          </a:xfrm>
+          <a:prstGeom prst="rect">
+            <a:avLst/>
+          </a:prstGeom>
+          <a:solidFill>
+            <a:srgbClr val="0369A1"/>
+          </a:solidFill>
+          <a:ln w="12700">
+            <a:solidFill>
+              <a:srgbClr val="0369A1"/>
+            </a:solidFill>
+            <a:prstDash val="solid"/>
+          </a:ln>
+        </p:spPr>
+      </p:sp>
+      <p:pic>
+        <p:nvPicPr>
+          <p:cNvPr id="17" name="Image 1" descr="preencoded.png">    </p:cNvPr>
+          <p:cNvPicPr>
+            <a:picLocks noChangeAspect="1"/>
+          </p:cNvPicPr>
+          <p:nvPr/>
+        </p:nvPicPr>
+        <p:blipFill>
+          <a:blip r:embed="rId2"/>
+          <a:stretch>
+            <a:fillRect/>
+          </a:stretch>
+        </p:blipFill>
+        <p:spPr>
+          <a:xfrm>
+            <a:off x="8481390" y="128016"/>
+            <a:ext cx="201168" cy="201168"/>
+          </a:xfrm>
+          <a:prstGeom prst="rect">
+            <a:avLst/>
+          </a:prstGeom>
+        </p:spPr>
+      </p:pic>
+      <p:sp>
+        <p:nvSpPr>
+          <p:cNvPr id="18" name="Text 14"/>
+          <p:cNvSpPr txBox="1"/>
+          <p:nvPr/>
+        </p:nvSpPr>
+        <p:spPr>
+          <a:xfrm>
+            <a:off x="8737422" y="91440"/>
+            <a:ext cx="2869057" cy="274320"/>
+          </a:xfrm>
+          <a:prstGeom prst="rect">
+            <a:avLst/>
+          </a:prstGeom>
+          <a:noFill/>
+          <a:ln/>
+        </p:spPr>
+        <p:txBody>
+          <a:bodyPr wrap="square" lIns="0" tIns="0" rIns="0" bIns="0" rtlCol="0" anchor="ctr"/>
+          <a:lstStyle/>
+          <a:p>
+            <a:pPr indent="0" marL="0">
+              <a:buNone/>
+            </a:pPr>
+            <a:r>
+              <a:rPr lang="en-US" sz="1100" b="1" dirty="0">
+                <a:solidFill>
+                  <a:srgbClr val="075985"/>
+                </a:solidFill>
+                <a:latin typeface="Calibri" pitchFamily="34" charset="0"/>
+                <a:ea typeface="Calibri" pitchFamily="34" charset="-122"/>
+                <a:cs typeface="Calibri" pitchFamily="34" charset="-120"/>
+              </a:rPr>
+              <a:t>UNDERSTAND NOW</a:t>
+            </a:r>
+            <a:pPr indent="0" marL="0">
+              <a:buNone/>
+            </a:pPr>
+            <a:r>
+              <a:rPr lang="en-US" sz="1100" dirty="0">
+                <a:solidFill>
+                  <a:srgbClr val="075985"/>
+                </a:solidFill>
+                <a:latin typeface="Calibri" pitchFamily="34" charset="0"/>
+                <a:ea typeface="Calibri" pitchFamily="34" charset="-122"/>
+                <a:cs typeface="Calibri" pitchFamily="34" charset="-120"/>
+              </a:rPr>
+              <a:t> · ROM, flash, firmware</a:t>
+            </a:r>
+            <a:endParaRPr lang="en-US" sz="1100" dirty="0"/>
+          </a:p>
+        </p:txBody>
+      </p:sp>
+      <p:sp>
+        <p:nvSpPr>
           <p:cNvPr id="25" name="Slide Number Placeholder 0"/>
           <p:cNvSpPr>
             <a:spLocks noGrp="1"/>
@@ -17277,6 +19105,133 @@
       </p:sp>
       <p:sp>
         <p:nvSpPr>
+          <p:cNvPr id="14" name="Shape 12"/>
+          <p:cNvSpPr/>
+          <p:nvPr/>
+        </p:nvSpPr>
+        <p:spPr>
+          <a:xfrm>
+            <a:off x="9075623" y="91440"/>
+            <a:ext cx="2567432" cy="274320"/>
+          </a:xfrm>
+          <a:prstGeom prst="rect">
+            <a:avLst/>
+          </a:prstGeom>
+          <a:solidFill>
+            <a:srgbClr val="E0F2FE"/>
+          </a:solidFill>
+          <a:ln w="12700">
+            <a:solidFill>
+              <a:srgbClr val="0369A1"/>
+            </a:solidFill>
+            <a:prstDash val="solid"/>
+          </a:ln>
+        </p:spPr>
+      </p:sp>
+      <p:sp>
+        <p:nvSpPr>
+          <p:cNvPr id="15" name="Shape 13"/>
+          <p:cNvSpPr/>
+          <p:nvPr/>
+        </p:nvSpPr>
+        <p:spPr>
+          <a:xfrm>
+            <a:off x="9075623" y="91440"/>
+            <a:ext cx="73152" cy="274320"/>
+          </a:xfrm>
+          <a:prstGeom prst="rect">
+            <a:avLst/>
+          </a:prstGeom>
+          <a:solidFill>
+            <a:srgbClr val="0369A1"/>
+          </a:solidFill>
+          <a:ln w="12700">
+            <a:solidFill>
+              <a:srgbClr val="0369A1"/>
+            </a:solidFill>
+            <a:prstDash val="solid"/>
+          </a:ln>
+        </p:spPr>
+      </p:sp>
+      <p:pic>
+        <p:nvPicPr>
+          <p:cNvPr id="16" name="Image 0" descr="preencoded.png">    </p:cNvPr>
+          <p:cNvPicPr>
+            <a:picLocks noChangeAspect="1"/>
+          </p:cNvPicPr>
+          <p:nvPr/>
+        </p:nvPicPr>
+        <p:blipFill>
+          <a:blip r:embed="rId1"/>
+          <a:stretch>
+            <a:fillRect/>
+          </a:stretch>
+        </p:blipFill>
+        <p:spPr>
+          <a:xfrm>
+            <a:off x="9203639" y="128016"/>
+            <a:ext cx="201168" cy="201168"/>
+          </a:xfrm>
+          <a:prstGeom prst="rect">
+            <a:avLst/>
+          </a:prstGeom>
+        </p:spPr>
+      </p:pic>
+      <p:sp>
+        <p:nvSpPr>
+          <p:cNvPr id="17" name="Text 14"/>
+          <p:cNvSpPr txBox="1"/>
+          <p:nvPr/>
+        </p:nvSpPr>
+        <p:spPr>
+          <a:xfrm>
+            <a:off x="9459671" y="91440"/>
+            <a:ext cx="2146808" cy="274320"/>
+          </a:xfrm>
+          <a:prstGeom prst="rect">
+            <a:avLst/>
+          </a:prstGeom>
+          <a:noFill/>
+          <a:ln/>
+        </p:spPr>
+        <p:txBody>
+          <a:bodyPr wrap="square" lIns="0" tIns="0" rIns="0" bIns="0" rtlCol="0" anchor="ctr"/>
+          <a:lstStyle/>
+          <a:p>
+            <a:pPr indent="0" marL="0">
+              <a:buNone/>
+            </a:pPr>
+            <a:r>
+              <a:rPr lang="en-US" sz="1100" b="1" dirty="0">
+                <a:solidFill>
+                  <a:srgbClr val="075985"/>
+                </a:solidFill>
+                <a:latin typeface="Calibri" pitchFamily="34" charset="0"/>
+                <a:ea typeface="Calibri" pitchFamily="34" charset="-122"/>
+                <a:cs typeface="Calibri" pitchFamily="34" charset="-120"/>
+              </a:rPr>
+              <a:t>UNDERSTAND NOW</a:t>
+            </a:r>
+            <a:pPr indent="0" marL="0">
+              <a:buNone/>
+            </a:pPr>
+            <a:r>
+              <a:rPr lang="en-US" sz="1100" dirty="0">
+                <a:solidFill>
+                  <a:srgbClr val="075985"/>
+                </a:solidFill>
+                <a:latin typeface="Calibri" pitchFamily="34" charset="0"/>
+                <a:ea typeface="Calibri" pitchFamily="34" charset="-122"/>
+                <a:cs typeface="Calibri" pitchFamily="34" charset="-120"/>
+              </a:rPr>
+              <a:t> · the cache</a:t>
+            </a:r>
+            <a:endParaRPr lang="en-US" sz="1100" dirty="0"/>
+          </a:p>
+        </p:txBody>
+      </p:sp>
+      <p:sp>
+        <p:nvSpPr>
           <p:cNvPr id="25" name="Slide Number Placeholder 0"/>
           <p:cNvSpPr>
             <a:spLocks noGrp="1"/>
@@ -18042,6 +19997,133 @@
               <a:t>only on a miss</a:t>
             </a:r>
             <a:endParaRPr lang="en-US" sz="1250" dirty="0"/>
+          </a:p>
+        </p:txBody>
+      </p:sp>
+      <p:sp>
+        <p:nvSpPr>
+          <p:cNvPr id="20" name="Shape 18"/>
+          <p:cNvSpPr/>
+          <p:nvPr/>
+        </p:nvSpPr>
+        <p:spPr>
+          <a:xfrm>
+            <a:off x="9075623" y="91440"/>
+            <a:ext cx="2567432" cy="274320"/>
+          </a:xfrm>
+          <a:prstGeom prst="rect">
+            <a:avLst/>
+          </a:prstGeom>
+          <a:solidFill>
+            <a:srgbClr val="E0F2FE"/>
+          </a:solidFill>
+          <a:ln w="12700">
+            <a:solidFill>
+              <a:srgbClr val="0369A1"/>
+            </a:solidFill>
+            <a:prstDash val="solid"/>
+          </a:ln>
+        </p:spPr>
+      </p:sp>
+      <p:sp>
+        <p:nvSpPr>
+          <p:cNvPr id="21" name="Shape 19"/>
+          <p:cNvSpPr/>
+          <p:nvPr/>
+        </p:nvSpPr>
+        <p:spPr>
+          <a:xfrm>
+            <a:off x="9075623" y="91440"/>
+            <a:ext cx="73152" cy="274320"/>
+          </a:xfrm>
+          <a:prstGeom prst="rect">
+            <a:avLst/>
+          </a:prstGeom>
+          <a:solidFill>
+            <a:srgbClr val="0369A1"/>
+          </a:solidFill>
+          <a:ln w="12700">
+            <a:solidFill>
+              <a:srgbClr val="0369A1"/>
+            </a:solidFill>
+            <a:prstDash val="solid"/>
+          </a:ln>
+        </p:spPr>
+      </p:sp>
+      <p:pic>
+        <p:nvPicPr>
+          <p:cNvPr id="22" name="Image 0" descr="preencoded.png">    </p:cNvPr>
+          <p:cNvPicPr>
+            <a:picLocks noChangeAspect="1"/>
+          </p:cNvPicPr>
+          <p:nvPr/>
+        </p:nvPicPr>
+        <p:blipFill>
+          <a:blip r:embed="rId1"/>
+          <a:stretch>
+            <a:fillRect/>
+          </a:stretch>
+        </p:blipFill>
+        <p:spPr>
+          <a:xfrm>
+            <a:off x="9203639" y="128016"/>
+            <a:ext cx="201168" cy="201168"/>
+          </a:xfrm>
+          <a:prstGeom prst="rect">
+            <a:avLst/>
+          </a:prstGeom>
+        </p:spPr>
+      </p:pic>
+      <p:sp>
+        <p:nvSpPr>
+          <p:cNvPr id="23" name="Text 20"/>
+          <p:cNvSpPr txBox="1"/>
+          <p:nvPr/>
+        </p:nvSpPr>
+        <p:spPr>
+          <a:xfrm>
+            <a:off x="9459671" y="91440"/>
+            <a:ext cx="2146808" cy="274320"/>
+          </a:xfrm>
+          <a:prstGeom prst="rect">
+            <a:avLst/>
+          </a:prstGeom>
+          <a:noFill/>
+          <a:ln/>
+        </p:spPr>
+        <p:txBody>
+          <a:bodyPr wrap="square" lIns="0" tIns="0" rIns="0" bIns="0" rtlCol="0" anchor="ctr"/>
+          <a:lstStyle/>
+          <a:p>
+            <a:pPr indent="0" marL="0">
+              <a:buNone/>
+            </a:pPr>
+            <a:r>
+              <a:rPr lang="en-US" sz="1100" b="1" dirty="0">
+                <a:solidFill>
+                  <a:srgbClr val="075985"/>
+                </a:solidFill>
+                <a:latin typeface="Calibri" pitchFamily="34" charset="0"/>
+                <a:ea typeface="Calibri" pitchFamily="34" charset="-122"/>
+                <a:cs typeface="Calibri" pitchFamily="34" charset="-120"/>
+              </a:rPr>
+              <a:t>UNDERSTAND NOW</a:t>
+            </a:r>
+            <a:pPr indent="0" marL="0">
+              <a:buNone/>
+            </a:pPr>
+            <a:r>
+              <a:rPr lang="en-US" sz="1100" dirty="0">
+                <a:solidFill>
+                  <a:srgbClr val="075985"/>
+                </a:solidFill>
+                <a:latin typeface="Calibri" pitchFamily="34" charset="0"/>
+                <a:ea typeface="Calibri" pitchFamily="34" charset="-122"/>
+                <a:cs typeface="Calibri" pitchFamily="34" charset="-120"/>
+              </a:rPr>
+              <a:t> · the cache</a:t>
+            </a:r>
+            <a:endParaRPr lang="en-US" sz="1100" dirty="0"/>
           </a:p>
         </p:txBody>
       </p:sp>
@@ -20098,6 +22180,133 @@
           </a:graphicData>
         </a:graphic>
       </p:graphicFrame>
+      <p:sp>
+        <p:nvSpPr>
+          <p:cNvPr id="4" name="Shape 1"/>
+          <p:cNvSpPr/>
+          <p:nvPr/>
+        </p:nvSpPr>
+        <p:spPr>
+          <a:xfrm>
+            <a:off x="9075623" y="91440"/>
+            <a:ext cx="2567432" cy="274320"/>
+          </a:xfrm>
+          <a:prstGeom prst="rect">
+            <a:avLst/>
+          </a:prstGeom>
+          <a:solidFill>
+            <a:srgbClr val="E0F2FE"/>
+          </a:solidFill>
+          <a:ln w="12700">
+            <a:solidFill>
+              <a:srgbClr val="0369A1"/>
+            </a:solidFill>
+            <a:prstDash val="solid"/>
+          </a:ln>
+        </p:spPr>
+      </p:sp>
+      <p:sp>
+        <p:nvSpPr>
+          <p:cNvPr id="5" name="Shape 2"/>
+          <p:cNvSpPr/>
+          <p:nvPr/>
+        </p:nvSpPr>
+        <p:spPr>
+          <a:xfrm>
+            <a:off x="9075623" y="91440"/>
+            <a:ext cx="73152" cy="274320"/>
+          </a:xfrm>
+          <a:prstGeom prst="rect">
+            <a:avLst/>
+          </a:prstGeom>
+          <a:solidFill>
+            <a:srgbClr val="0369A1"/>
+          </a:solidFill>
+          <a:ln w="12700">
+            <a:solidFill>
+              <a:srgbClr val="0369A1"/>
+            </a:solidFill>
+            <a:prstDash val="solid"/>
+          </a:ln>
+        </p:spPr>
+      </p:sp>
+      <p:pic>
+        <p:nvPicPr>
+          <p:cNvPr id="6" name="Image 0" descr="preencoded.png">    </p:cNvPr>
+          <p:cNvPicPr>
+            <a:picLocks noChangeAspect="1"/>
+          </p:cNvPicPr>
+          <p:nvPr/>
+        </p:nvPicPr>
+        <p:blipFill>
+          <a:blip r:embed="rId1"/>
+          <a:stretch>
+            <a:fillRect/>
+          </a:stretch>
+        </p:blipFill>
+        <p:spPr>
+          <a:xfrm>
+            <a:off x="9203639" y="128016"/>
+            <a:ext cx="201168" cy="201168"/>
+          </a:xfrm>
+          <a:prstGeom prst="rect">
+            <a:avLst/>
+          </a:prstGeom>
+        </p:spPr>
+      </p:pic>
+      <p:sp>
+        <p:nvSpPr>
+          <p:cNvPr id="7" name="Text 3"/>
+          <p:cNvSpPr txBox="1"/>
+          <p:nvPr/>
+        </p:nvSpPr>
+        <p:spPr>
+          <a:xfrm>
+            <a:off x="9459671" y="91440"/>
+            <a:ext cx="2146808" cy="274320"/>
+          </a:xfrm>
+          <a:prstGeom prst="rect">
+            <a:avLst/>
+          </a:prstGeom>
+          <a:noFill/>
+          <a:ln/>
+        </p:spPr>
+        <p:txBody>
+          <a:bodyPr wrap="square" lIns="0" tIns="0" rIns="0" bIns="0" rtlCol="0" anchor="ctr"/>
+          <a:lstStyle/>
+          <a:p>
+            <a:pPr indent="0" marL="0">
+              <a:buNone/>
+            </a:pPr>
+            <a:r>
+              <a:rPr lang="en-US" sz="1100" b="1" dirty="0">
+                <a:solidFill>
+                  <a:srgbClr val="075985"/>
+                </a:solidFill>
+                <a:latin typeface="Calibri" pitchFamily="34" charset="0"/>
+                <a:ea typeface="Calibri" pitchFamily="34" charset="-122"/>
+                <a:cs typeface="Calibri" pitchFamily="34" charset="-120"/>
+              </a:rPr>
+              <a:t>UNDERSTAND NOW</a:t>
+            </a:r>
+            <a:pPr indent="0" marL="0">
+              <a:buNone/>
+            </a:pPr>
+            <a:r>
+              <a:rPr lang="en-US" sz="1100" dirty="0">
+                <a:solidFill>
+                  <a:srgbClr val="075985"/>
+                </a:solidFill>
+                <a:latin typeface="Calibri" pitchFamily="34" charset="0"/>
+                <a:ea typeface="Calibri" pitchFamily="34" charset="-122"/>
+                <a:cs typeface="Calibri" pitchFamily="34" charset="-120"/>
+              </a:rPr>
+              <a:t> · the cache</a:t>
+            </a:r>
+            <a:endParaRPr lang="en-US" sz="1100" dirty="0"/>
+          </a:p>
+        </p:txBody>
+      </p:sp>
       <p:sp>
         <p:nvSpPr>
           <p:cNvPr id="25" name="Slide Number Placeholder 0"/>

--- a/en/slides/16-Computer_Architecture-Permanent_Memory.pptx
+++ b/en/slides/16-Computer_Architecture-Permanent_Memory.pptx
@@ -126,32 +126,32 @@
   <p:extLst>
     <p:ext uri="{521415D9-36F7-43E2-AB2F-B90AF26B5E84}">
       <p14:sectionLst xmlns:p14="http://schemas.microsoft.com/office/powerpoint/2010/main">
-        <p14:section name="Opening" id="{ee19e755-90bc-576c-763e-13e324b86c05}">
+        <p14:section name="Opening" id="{18595713-ed3f-a29a-39af-303d80ac8d12}">
           <p14:sldIdLst>
             <p14:sldId id="256"/>
             <p14:sldId id="257"/>
           </p14:sldIdLst>
         </p14:section>
-        <p14:section name="The components of a computer" id="{6510b08d-6e6a-5508-c4f4-9a2d4a0c7f81}">
+        <p14:section name="The components of a computer" id="{dfb44b4b-cb7d-4b14-42a8-825e932c9734}">
           <p14:sldIdLst>
             <p14:sldId id="258"/>
             <p14:sldId id="259"/>
           </p14:sldIdLst>
         </p14:section>
-        <p14:section name="Non-volatile memories" id="{e0779cfa-51fd-d26e-049b-992490860556}">
+        <p14:section name="Non-volatile memories" id="{ad9b0c94-a49e-dbc0-ef5d-c1c212de317b}">
           <p14:sldIdLst>
             <p14:sldId id="260"/>
             <p14:sldId id="261"/>
           </p14:sldIdLst>
         </p14:section>
-        <p14:section name="The cache" id="{b125a1a8-4b7b-2f12-aec7-fa335b8d35b2}">
+        <p14:section name="The cache" id="{1437bd59-a515-bd90-1ffe-357febfd5b13}">
           <p14:sldIdLst>
             <p14:sldId id="262"/>
             <p14:sldId id="263"/>
             <p14:sldId id="264"/>
           </p14:sldIdLst>
         </p14:section>
-        <p14:section name="Secondary memory" id="{b0bdf76e-20f0-982c-1101-a9d03d21088a}">
+        <p14:section name="Secondary memory" id="{a672e740-ebed-0d6d-13bf-3661470c453f}">
           <p14:sldIdLst>
             <p14:sldId id="265"/>
             <p14:sldId id="266"/>
@@ -159,13 +159,13 @@
             <p14:sldId id="268"/>
           </p14:sldIdLst>
         </p14:section>
-        <p14:section name="Optical disks" id="{06642e2b-031c-a64a-9b4a-5ecbe69ec395}">
+        <p14:section name="Optical disks" id="{54dbd5e4-22a9-369f-7b6f-a8b511a68774}">
           <p14:sldIdLst>
             <p14:sldId id="269"/>
             <p14:sldId id="270"/>
           </p14:sldIdLst>
         </p14:section>
-        <p14:section name="Storage on several levels" id="{3c5c4837-ddea-9832-6992-86e0f7d10192}">
+        <p14:section name="Storage on several levels" id="{5eba128c-98d6-a349-4bd6-6dfd8ea235a4}">
           <p14:sldIdLst>
             <p14:sldId id="271"/>
             <p14:sldId id="272"/>

--- a/en/slides/16-Computer_Architecture-Permanent_Memory.pptx
+++ b/en/slides/16-Computer_Architecture-Permanent_Memory.pptx
@@ -126,32 +126,32 @@
   <p:extLst>
     <p:ext uri="{521415D9-36F7-43E2-AB2F-B90AF26B5E84}">
       <p14:sectionLst xmlns:p14="http://schemas.microsoft.com/office/powerpoint/2010/main">
-        <p14:section name="Opening" id="{18595713-ed3f-a29a-39af-303d80ac8d12}">
+        <p14:section name="Opening" id="{ab71083d-5ba8-3e3a-8fa3-e235bcab8cdb}">
           <p14:sldIdLst>
             <p14:sldId id="256"/>
             <p14:sldId id="257"/>
           </p14:sldIdLst>
         </p14:section>
-        <p14:section name="The components of a computer" id="{dfb44b4b-cb7d-4b14-42a8-825e932c9734}">
+        <p14:section name="The components of a computer" id="{94d0a210-37ce-034c-de90-a921680effb6}">
           <p14:sldIdLst>
             <p14:sldId id="258"/>
             <p14:sldId id="259"/>
           </p14:sldIdLst>
         </p14:section>
-        <p14:section name="Non-volatile memories" id="{ad9b0c94-a49e-dbc0-ef5d-c1c212de317b}">
+        <p14:section name="Non-volatile memories" id="{f7798c83-b951-c735-ec3f-fe8ff3e7f049}">
           <p14:sldIdLst>
             <p14:sldId id="260"/>
             <p14:sldId id="261"/>
           </p14:sldIdLst>
         </p14:section>
-        <p14:section name="The cache" id="{1437bd59-a515-bd90-1ffe-357febfd5b13}">
+        <p14:section name="The cache" id="{552b4c52-50ad-8433-c423-370e46c253ca}">
           <p14:sldIdLst>
             <p14:sldId id="262"/>
             <p14:sldId id="263"/>
             <p14:sldId id="264"/>
           </p14:sldIdLst>
         </p14:section>
-        <p14:section name="Secondary memory" id="{a672e740-ebed-0d6d-13bf-3661470c453f}">
+        <p14:section name="Secondary memory" id="{9941ff31-4b1f-01f7-ca73-256dc1bb67d2}">
           <p14:sldIdLst>
             <p14:sldId id="265"/>
             <p14:sldId id="266"/>
@@ -159,13 +159,13 @@
             <p14:sldId id="268"/>
           </p14:sldIdLst>
         </p14:section>
-        <p14:section name="Optical disks" id="{54dbd5e4-22a9-369f-7b6f-a8b511a68774}">
+        <p14:section name="Optical disks" id="{9dfba767-5767-c1db-c88a-da4f78192cc3}">
           <p14:sldIdLst>
             <p14:sldId id="269"/>
             <p14:sldId id="270"/>
           </p14:sldIdLst>
         </p14:section>
-        <p14:section name="Storage on several levels" id="{5eba128c-98d6-a349-4bd6-6dfd8ea235a4}">
+        <p14:section name="Storage on several levels" id="{37f0ee46-17b3-4d55-3143-b3a78d410659}">
           <p14:sldIdLst>
             <p14:sldId id="271"/>
             <p14:sldId id="272"/>
@@ -578,7 +578,7 @@
           <a:p>
             <a:r>
               <a:rPr lang="en-US" dirty="0"/>
-              <a:t>The previous lecture dealt with the memory that forgets when the power goes. This one deals with the memories that do not: the chips that hold the firmware, the disks, the optical media, the tapes. Between the two it places the cache, a small fast memory that hides the slowness of a large one. The quotation is by a professor of numerical computing of this university, and every student learns its truth sooner or later: a datum does not exist unless it has been saved.
+              <a:t>The previous lecture treated the memory that forgets when power is removed. This one treats the memories that do not: the chips that hold the firmware, magnetic disks, optical media and tapes. Between the two it places the cache, a small fast memory that conceals the slowness of a large one, and the lecture's unifying idea is that this same strategy recurs at every scale. The epigraph is by a professor of numerical computing of this university, and every student eventually learns its truth: a datum does not exist until it has been saved.
 Learning status: UNDERSTAND NOW, by the end of this lecture you explain it, trace it and apply it on your own; USE NOW, you follow and use the recipe today; how it works inside is explained later, or is not part of the course; UNDERSTAND LATER, recognise the name and what it is for; a later lecture explains it. A slide without a badge is context: a story, an example, a question, an exercise.
 Learning status of this lecture. UNDERSTAND NOW: ROM, flash, firmware; the von Neumann architecture; the cache; secondary memory. USE NOW: the complete program, the PRG32 tools (used, not studied, in this course). UNDERSTAND LATER: nothing. A slide without a badge is context: a story, an example, a question, an exercise.
 For the lecturer: Spiral: a cartridge keeps its title string across a power cycle but loses its high score; the lecture explains where each lives, then covers ROM and flash, the cache, and mass storage.</a:t>
@@ -669,7 +669,7 @@
           <a:p>
             <a:r>
               <a:rPr lang="en-US" dirty="0"/>
-              <a:t>Four properties define secondary memories with respect to the main memory. They are non-volatile. Their capacity is several orders of magnitude larger. Their cost per bit is several orders of magnitude lower. And their access is some orders of magnitude slower. Two more facts concern their organisation: information is stored in blocks, not in single bytes, and some media allow direct access to any block while others, like tapes, only sequential access.
+              <a:t>Four properties characterise secondary memories in relation to main memory. They are non-volatile. Their capacity is several orders of magnitude larger, and their cost per bit several orders of magnitude lower. Their access is some orders of magnitude slower. Two further facts concern their organisation: information is stored in blocks, not individual bytes, and some media permit direct access to any block while others, such as tape, permit only sequential access.
 UNDERSTAND NOW: secondary memory.
 For the lecturer: The secondary memory stores and keeps all the programs and data of the computer; the main memory holds the programs being executed and the data they need.
 Pictures: Open hard-drive.jpg, Zzubnik, Public domain, Wikimedia Commons.</a:t>
@@ -760,7 +760,7 @@
           <a:p>
             <a:r>
               <a:rPr lang="en-US" dirty="0"/>
-              <a:t>The geometry of a magnetic disk. Platters coated with a magnetisable material spin at constant speed, and heads read and write. The surface is divided into concentric tracks and into sectors, slices like those of a cake. A sector cuts each track into blocks, and the block, identified by its track and sector, is the smallest unit that can be addressed. Formatting is the operation that draws this division. Access is direct: the head goes to any block without passing over all the previous ones.
+              <a:t>The geometry of a magnetic disk. Platters coated with a magnetisable material rotate at constant speed, while heads read and write. The surface is divided into concentric tracks and into sectors, wedge-shaped regions. A sector divides each track into blocks, and the block, identified by its track and sector, is the smallest addressable unit. Formatting is the operation that establishes this division. Access is direct: the head can reach any block without traversing all those that precede it.
 UNDERSTAND NOW: secondary memory.
 For the lecturer: Dischi magnetici. Several sectors form a cluster; the tracks at the same radius on all the platters form a cylinder. The original picture had Italian labels and is redrawn.</a:t>
             </a:r>
@@ -850,7 +850,7 @@
           <a:p>
             <a:r>
               <a:rPr lang="en-US" dirty="0"/>
-              <a:t>The access time of a disk is the sum of three times. Seek time: the time to move the head radially to the right track. Latency: the wait for the desired sector to pass under the head, which depends on the speed of rotation. Transfer time: the time for the block to pass under the head. The total is a matter of milliseconds: a million times slower than RAM. In the time of one disk access the processor of the kit could execute more than a hundred thousand instructions.
+              <a:t>The access time of a disk is the sum of three components. Seek time: the time to move the head radially to the correct track. Rotational latency: the wait for the desired sector to arrive under the head, which depends on the rotation speed. Transfer time: the time for the block to pass under the head. The total is of the order of milliseconds, about a million times slower than RAM: during one disk access the processor of the kit could execute more than a hundred thousand instructions. The gap explains why operating systems work so hard to avoid disk accesses.
 UNDERSTAND NOW: secondary memory.
 For the lecturer: A millisecond is a million nanoseconds: during one disk access a 160 MHz processor could execute more than a hundred thousand instructions.</a:t>
             </a:r>
@@ -940,7 +940,7 @@
           <a:p>
             <a:r>
               <a:rPr lang="en-US" dirty="0"/>
-              <a:t>Two technologies for the same job. A hard disk has magnetic platters and moving heads: its access time is dominated by mechanics, but its cost per terabyte is the lowest, and it remains the choice for large archives and backups. A solid-state disk is flash memory with a controller and no moving parts: its access time is tens of microseconds, and it is the standard storage of laptops and phones. It is the same technology as the flash chip of the kit.
+              <a:t>Two technologies serving the same purpose. A hard disk has magnetic platters and moving heads; its access time is dominated by mechanics, but its cost per terabyte is the lowest available, and it remains the choice for large archives and backups. A solid-state disk is flash memory with a controller and no moving parts; its access time is of the order of tens of microseconds, and it is the standard storage of laptops and phones. It uses the same technology as the flash chip of the kit.
 UNDERSTAND NOW: secondary memory.
 For the lecturer: New with respect to the original deck, which listed SSDs only among the storage levels. The parallel ATA bus of older PCs gave way to Serial ATA and then to NVMe.</a:t>
             </a:r>
@@ -1030,7 +1030,7 @@
           <a:p>
             <a:r>
               <a:rPr lang="en-US" dirty="0"/>
-              <a:t>An optical disk is read by a laser beam whose reflection changes between the pits and the flat surface, the land. The point that is always asked in the exam: 0 and 1 are not pit and land. A 1 is a change, from pit to land or from land to pit; a 0 is no change. Such disks are usually written once, because the physical modification is irreversible, which makes them suitable for distributing programs and for archives that must not be altered.
+              <a:t>An optical disk is read by a laser beam whose reflection differs between the pits and the flat surface, the land. One point is invariably examined: 0 and 1 do not correspond to pit and land. A 1 is a transition, from pit to land or from land to pit; a 0 is the absence of a transition. Such disks are usually written once, because the physical modification is irreversible, which makes them suitable for distributing software and for archives that must not be altered.
 UNDERSTAND NOW: secondary memory.
 For the lecturer: Encoding a 1 as a transition is a self-clocking idea used in many serial links as well.
 Pictures: CD-ROM pressed pits.jpg, Tycho, CC0, Wikimedia Commons.</a:t>
@@ -1121,7 +1121,7 @@
           <a:p>
             <a:r>
               <a:rPr lang="en-US" dirty="0"/>
-              <a:t>In a compact disc the information is on a single spiral track, with a distance of 1.6 micrometres between one turn and the next. The recording density is constant along the spiral, so to read at a constant rate the disk must turn faster near the centre and more slowly near the edge: this is constant linear velocity. The alternative, constant angular velocity, keeps the rotation constant and wastes the outer part of the disk. The speed was originally set by the needs of music.
+              <a:t>On a compact disc the information lies on a single spiral track, with 1.6 micrometres between successive turns. The recording density is constant along the spiral, so to read at a constant rate the disc must rotate faster near the centre and more slowly near the edge: this is constant linear velocity. The alternative, constant angular velocity, keeps the rotation fixed and wastes capacity in the outer region. The original speed was dictated by the requirements of audio playback.
 UNDERSTAND NOW: secondary memory.
 For the lecturer: 1x = 1.2 m/s. CD-Recordable: two layers of polycarbonate enclose a thin reflective sheet covered by a translucent dye.
 Pictures: CD Player focusing lens assembly.jpg, Zim 256, CC BY-SA 3.0, Wikimedia Commons.</a:t>
@@ -1212,7 +1212,7 @@
           <a:p>
             <a:r>
               <a:rPr lang="en-US" dirty="0"/>
-              <a:t>Five levels of permanent memory, from the fastest to the cheapest: a RAM disk, which is a piece of main memory used as a disk; solid-state disks; hard disks; disk libraries, in which some disks are switched on only when needed; and tape libraries, in which robots mount the tapes. The system moves the data automatically: what is used often migrates towards the fast levels, the rest sinks towards the cheap ones. It is the idea of the cache, applied to storage.
+              <a:t>Five levels of permanent memory, from the fastest to the cheapest: a RAM disk, a portion of main memory used as a disk; solid-state disks; hard disks; disk libraries, in which some disks are powered only when needed; and tape libraries, in which robots mount the tapes. The system migrates data automatically: frequently used data move towards the fast levels, the remainder sink towards the cheap ones. This is the principle of the cache, applied to storage, and the lecture thus closes on the idea with which it began.
 UNDERSTAND NOW: secondary memory.
 For the lecturer: The same idea as the cache, applied to storage. The department's HPC storage works this way (visit at the end of the course).</a:t>
             </a:r>
@@ -1302,8 +1302,8 @@
           <a:p>
             <a:r>
               <a:rPr lang="en-US" dirty="0"/>
-              <a:t>Go through the table of non-volatile memories asking two questions for each: how is it erased, and how much at a time? Only one is erased electrically and in blocks.
-A miss is not an error. The program does not notice anything, except that this access takes longer: the datum is fetched from the main memory and kept in the cache together with its neighbours.
+              <a:t>For the first question each entry of the table of non-volatile memories is examined with two questions: how is it erased, and in what quantity at a time? Only one is erased electrically and in blocks.
+For the second: a miss is not an error. The program observes nothing beyond a longer access: the datum is fetched from main memory and retained in the cache together with its neighbours.
 For the lecturer: 1. Answer: D. Flash is the block-erasable evolution of EEPROM. EPROM needs ultraviolet light; ROM and PROM cannot be erased.
 2. Answer: B. The access is simply slower: the block containing the address is loaded into the cache, betting that nearby addresses will be needed soon.</a:t>
             </a:r>
@@ -1393,8 +1393,8 @@
           <a:p>
             <a:r>
               <a:rPr lang="en-US" dirty="0"/>
-              <a:t>Which of the three times is a wait for the disk to turn? The movement of the arm does not depend on the rotation; formatting and booting are not components of the access time.
-Recall the rule of optical disks: what counts is not the pit or the land, but the passage from one to the other.
+              <a:t>For the first question one asks which of the three components is a wait for the disk to rotate. The movement of the arm does not depend on rotation, and formatting and booting are not components of the access time.
+For the second, the rule of optical disks applies: what matters is not the pit or the land but the transition between them.
 For the lecturer: 1. Answer: B. Latency is the wait for the sector to arrive under the head; seek time depends on the movement of the arm.
 2. Answer: C. A change of reflectivity, in either direction, is a 1; no change is a 0.</a:t>
             </a:r>
@@ -1484,7 +1484,7 @@
           <a:p>
             <a:r>
               <a:rPr lang="en-US" dirty="0"/>
-              <a:t>Ten terms. The motherboard is the scheda madre. A cache hit and miss are a success and a failure in finding the datum. Seek time and latency are two components of the access time of a disk. Mass storage is the secondary memory as a whole. A tape library is a storage system with tapes handled by robots.</a:t>
+              <a:t>Ten terms. The motherboard is the scheda madre. A cache hit and miss denote success and failure in finding the datum. Seek time and latency are two components of the access time of a disk. Mass storage denotes the secondary memory as a whole. A tape library is a storage system with robot-handled tapes.</a:t>
             </a:r>
             <a:endParaRPr lang="en-US" dirty="0"/>
           </a:p>
@@ -1572,7 +1572,7 @@
           <a:p>
             <a:r>
               <a:rPr lang="en-US" dirty="0"/>
-              <a:t>Six objectives. Name the functional units of a computer and find them on a motherboard and on the kit. Distinguish ROM, PROM, EPROM, EEPROM and flash, and say what firmware is. Explain why a cache makes a computer faster, and what a miss is. Describe tracks, sectors and blocks of a magnetic disk and the components of its access time. Explain how an optical disk stores bits, and how a compact disc is read. And place flash, solid-state disks, hard disks and tapes in a storage system with several levels.</a:t>
+              <a:t>Six learning outcomes. Naming the functional units of a computer and locating them on a motherboard and on the kit. Distinguishing ROM, PROM, EPROM, EEPROM and flash, and stating what firmware is. Explaining why a cache makes a computer faster, and what a miss is. Describing the tracks, sectors and blocks of a magnetic disk and the components of its access time. Explaining how an optical disk stores bits and how a compact disc is read. And placing flash, solid-state disks, hard disks and tapes within a multi-level storage system.</a:t>
             </a:r>
             <a:endParaRPr lang="en-US" dirty="0"/>
           </a:p>
@@ -1660,7 +1660,7 @@
           <a:p>
             <a:r>
               <a:rPr lang="en-US" dirty="0"/>
-              <a:t>Five conclusions. Non-volatile memories usually hold the firmware, the basic software of a machine. The cache improves performance by keeping a copy of part of the main memory close to the processor. The same idea, a small fast level in front of a large slow one, is used again in storage. Permanent memories can be semiconductor, magnetic or optical. And a modern system has several levels, managed automatically. Next comes Part 3 of Verm1, which uses memory as it has never been used so far in the project.
+              <a:t>Five conclusions. Non-volatile memories typically hold the firmware, the basic software of a machine. The cache improves performance by keeping a copy of part of main memory close to the processor. The same idea, a small fast level in front of a large slow one, recurs in storage systems. Permanent memories may be semiconductor, magnetic or optical. And a modern system comprises several levels, managed automatically. Part 3 of Verm1 follows, and uses memory as the project has not used it before.
 Learning status, recap. UNDERSTAND NOW: ROM, flash, firmware; the von Neumann architecture; the cache; secondary memory. USE NOW: the complete program, the PRG32 tools (used, not studied, in this course). UNDERSTAND LATER: nothing. A slide without a badge is context: a story, an example, a question, an exercise.
 For the lecturer: Next: Verm1, part 3: a body, rules and states. Then the processor.</a:t>
             </a:r>
@@ -1750,7 +1750,7 @@
           <a:p>
             <a:r>
               <a:rPr lang="en-US" dirty="0"/>
-              <a:t>Six cards: the processor, the main memory, the secondary memory, the input and output devices, the communication lines, and a remark about packaging. Each card names the unit and then says where it is on the kit: the RISC-V core, the 512 KB of SRAM, the flash chip, the display with joystick and amplifier. The last card is the difference between a PC and a microcontroller: the first spreads the units over a motherboard, the second puts almost all of them in one package.
+              <a:t>Six cards: the processor, the main memory, the secondary memory, the input and output devices, the communication lines, and a remark on physical integration. Each card names the unit and locates it on the kit: the RISC-V core, the 512 KB of SRAM, the flash chip, the display with its joystick and amplifier. The last card states the difference between a PC and a microcontroller: the former distributes the units across a motherboard, the latter integrates almost all of them in a single package.
 UNDERSTAND NOW: the von Neumann architecture.</a:t>
             </a:r>
             <a:endParaRPr lang="en-US" dirty="0"/>
@@ -1839,7 +1839,7 @@
           <a:p>
             <a:r>
               <a:rPr lang="en-US" dirty="0"/>
-              <a:t>Firmware is the basic software kept in a non-volatile memory. In a PC it was called BIOS and did four jobs: test the devices at power-on, configure them, start the operating system, and offer basic functions for keyboard and disks; today its heir is called UEFI. The kit has a similar chain: a small program in ROM starts a bootloader in flash, which starts the PRG32 firmware, which loads the cartridge you choose. Each stage finds, checks and starts the next.
+              <a:t>Firmware is the basic software held in non-volatile memory. In a PC it was called the BIOS and performed four tasks: testing the devices at power-on, configuring them, starting the operating system, and offering elementary services for keyboard and disks; its contemporary successor is UEFI. The kit has an analogous chain: a small program in ROM starts a bootloader in flash, which starts the PRG32 firmware, which loads the selected cartridge. Each stage locates, verifies and starts the next, a structure known as a boot chain.
 UNDERSTAND NOW: ROM, flash, firmware.
 For the lecturer: Each stage finds, checks and starts the next: a chain that ends with the first instruction of first_init.</a:t>
             </a:r>
@@ -1929,7 +1929,7 @@
           <a:p>
             <a:r>
               <a:rPr lang="en-US" dirty="0"/>
-              <a:t>Read the table from top to bottom as a history of convenience. A ROM is written by the manufacturer once and for all. A PROM can be written by the user, once. An EPROM can be erased, all at once, by exposing it to ultraviolet light through a small window, and written again. An EEPROM is erased electrically, one byte at a time, without removing it. Flash is erased electrically in blocks: less flexible than EEPROM, but much cheaper, and today it is everywhere.
+              <a:t>The table, read from top to bottom, is a history of increasing convenience. A ROM is written by the manufacturer once and for all. A PROM can be written by the user, once. An EPROM can be erased in its entirety by exposure to ultraviolet light through a small window, and then rewritten. An EEPROM is erased electrically, one byte at a time, in circuit. Flash is erased electrically in blocks: less flexible than EEPROM, but far cheaper per bit, and today ubiquitous.
 UNDERSTAND NOW: ROM, flash, firmware.
 For the lecturer: Read-only memory; programmable ROM; erasable PROM; electrically erasable PROM. Access time of the order of nanoseconds for reading. EEPROM and flash are slower and, per bit, once dearer than RAM; flash is today the cheapest semiconductor memory.</a:t>
             </a:r>
@@ -2019,7 +2019,7 @@
           <a:p>
             <a:r>
               <a:rPr lang="en-US" dirty="0"/>
-              <a:t>Three properties of flash explain how it is used. It is erased by blocks, not by single bytes: erasing sets all the bits of a block to 1, and writing can only turn 1s into 0s. Each block survives a limited number of erasures, so a controller spreads the writes evenly. And reading is fast, while writing and above all erasing are slow. This is why the best score of the warm-up is not simply written into the cartridge at every frame: flash is not a place for variables.
+              <a:t>Three properties of flash determine how it is used. It is erased by blocks, not by individual bytes: erasure sets every bit of a block to 1, and writing can only turn 1s into 0s. Each block tolerates a limited number of erasures, so a controller distributes writes evenly, a technique called wear levelling. And reading is fast, while writing, and above all erasing, are slow. This is why the best score of the warm-up is not simply written into the cartridge at every frame: flash is not a medium for variables.
 UNDERSTAND NOW: ROM, flash, firmware.
 For the lecturer: This is why the best score of the warm-up is not simply written back into the cartridge at every frame: flash is not a place for variables.
 Pictures: Pair of BIOS chips.jpg, Jud McCranie, CC BY-SA 4.0, Wikimedia Commons.</a:t>
@@ -2110,7 +2110,7 @@
           <a:p>
             <a:r>
               <a:rPr lang="en-US" dirty="0"/>
-              <a:t>While the memory is being read or written the processor waits, and the slower the memory the more clock cycles are lost. Why not make all the memory as fast as the registers? Because it would have to be on the same chip as the processor, and it could not then be large. The compromise: a small, fast memory on the processor chip, and a larger, slower one reached through the bus.
+              <a:t>While memory is being read or written the processor waits, and the slower the memory, the more clock cycles are lost. Why not make all memory as fast as the registers? Because it would then have to reside on the same chip as the processor, which precludes making it large. The compromise is a small, fast memory on the processor chip and a larger, slower one reached through the bus, which is the memory hierarchy of Lecture 15 reduced to its two upper levels.
 UNDERSTAND NOW: the cache.
 For the lecturer: Perché non costruire memorie veloci quanto i registri della CPU?</a:t>
             </a:r>
@@ -2200,7 +2200,7 @@
           <a:p>
             <a:r>
               <a:rPr lang="en-US" dirty="0"/>
-              <a:t>The cache sits between the processor and the main memory. At every access the processor looks in the cache first. If the content of the requested address is there, it is a hit and the datum arrives at once. If it is not, it is a miss: the datum is copied from the main memory into the cache, together with a number of neighbouring locations. The bet behind this is the principle of locality: a program that has just used an address will probably use it, or its neighbours, again soon. Loops and arrays are the reason.
+              <a:t>The cache is placed between the processor and main memory. At every access the processor looks first in the cache. If the content of the requested address is present, the access is a hit and the datum arrives at once. If it is not, the access is a miss: the datum is copied from main memory into the cache, together with a number of neighbouring locations, forming a cache line. The wager underlying the design is the principle of locality: a program that has just used an address is likely to use it, or its neighbours, again soon. Loops are the source of temporal locality, arrays of spatial locality.
 UNDERSTAND NOW: the cache.
 For the lecturer: The principle of locality: a program that has just used an address will probably use it again soon (temporal locality) and will probably use its neighbours (spatial locality). Loops and arrays are the reason.</a:t>
             </a:r>
@@ -2290,7 +2290,7 @@
           <a:p>
             <a:r>
               <a:rPr lang="en-US" dirty="0"/>
-              <a:t>Typical numbers. A PC has several levels of cache: a first level of tens of kilobytes inside each core, a second level of hundreds of kilobytes, and a third level of megabytes shared by the cores. The last column is the kit: no cache at all in front of its SRAM, because that memory is already as fast as the core needs; only the external flash is read through a small cache. Comparing the three columns also shows how main memory and storage have grown in twenty years.
+              <a:t>Representative figures. A PC has several cache levels: a first level of tens of kilobytes inside each core, a second of hundreds of kilobytes, and a third of megabytes shared among the cores. The last column is the kit: no cache in front of its SRAM, which is already as fast as the core requires, and only the external flash is read through a small cache. Comparing the columns also shows how main memory and storage have grown over twenty years.
 UNDERSTAND NOW: the cache.
 For the lecturer: First level (internal): keeps a continuous flow inside the processor. Second level: limits the slowdown due to the main memory. Third level (8 to 32 MB and more): shared by the cores of the same processor. Caches are built with SRAM. On the ESP32-C6 the SRAM is already as fast as the core needs; only the external flash sits behind a cache.</a:t>
             </a:r>
@@ -3370,7 +3370,7 @@
                 <a:ea typeface="Calibri" pitchFamily="34" charset="-122"/>
                 <a:cs typeface="Calibri" pitchFamily="34" charset="-120"/>
               </a:rPr>
-              <a:t>16-Computer_Architecture-Permanent_Memory-Code.pptx</a:t>
+              <a:t>16-Computer_Architecture-Permanent_Memory-Lab.pptx</a:t>
             </a:r>
             <a:endParaRPr lang="en-US" sz="1300" dirty="0"/>
           </a:p>

--- a/en/slides/16-Computer_Architecture-Permanent_Memory.pptx
+++ b/en/slides/16-Computer_Architecture-Permanent_Memory.pptx
@@ -126,32 +126,32 @@
   <p:extLst>
     <p:ext uri="{521415D9-36F7-43E2-AB2F-B90AF26B5E84}">
       <p14:sectionLst xmlns:p14="http://schemas.microsoft.com/office/powerpoint/2010/main">
-        <p14:section name="Opening" id="{ab71083d-5ba8-3e3a-8fa3-e235bcab8cdb}">
+        <p14:section name="Opening" id="{21e85b30-3378-6d47-3ded-a0f84f9043b2}">
           <p14:sldIdLst>
             <p14:sldId id="256"/>
             <p14:sldId id="257"/>
           </p14:sldIdLst>
         </p14:section>
-        <p14:section name="The components of a computer" id="{94d0a210-37ce-034c-de90-a921680effb6}">
+        <p14:section name="The components of a computer" id="{68ae35de-f7f4-dc83-a916-81d76ec22108}">
           <p14:sldIdLst>
             <p14:sldId id="258"/>
             <p14:sldId id="259"/>
           </p14:sldIdLst>
         </p14:section>
-        <p14:section name="Non-volatile memories" id="{f7798c83-b951-c735-ec3f-fe8ff3e7f049}">
+        <p14:section name="Non-volatile memories" id="{abfd08f4-4168-e65b-eac2-75b78608484d}">
           <p14:sldIdLst>
             <p14:sldId id="260"/>
             <p14:sldId id="261"/>
           </p14:sldIdLst>
         </p14:section>
-        <p14:section name="The cache" id="{552b4c52-50ad-8433-c423-370e46c253ca}">
+        <p14:section name="The cache" id="{2ab6deaf-674e-e96f-12f5-730b028d4c6e}">
           <p14:sldIdLst>
             <p14:sldId id="262"/>
             <p14:sldId id="263"/>
             <p14:sldId id="264"/>
           </p14:sldIdLst>
         </p14:section>
-        <p14:section name="Secondary memory" id="{9941ff31-4b1f-01f7-ca73-256dc1bb67d2}">
+        <p14:section name="Secondary memory" id="{981992be-253d-fc1f-43da-6fa670bfa016}">
           <p14:sldIdLst>
             <p14:sldId id="265"/>
             <p14:sldId id="266"/>
@@ -159,13 +159,13 @@
             <p14:sldId id="268"/>
           </p14:sldIdLst>
         </p14:section>
-        <p14:section name="Optical disks" id="{9dfba767-5767-c1db-c88a-da4f78192cc3}">
+        <p14:section name="Optical disks" id="{38d7f549-f229-9553-7d2e-017fa128fb34}">
           <p14:sldIdLst>
             <p14:sldId id="269"/>
             <p14:sldId id="270"/>
           </p14:sldIdLst>
         </p14:section>
-        <p14:section name="Storage on several levels" id="{37f0ee46-17b3-4d55-3143-b3a78d410659}">
+        <p14:section name="Storage on several levels" id="{f2860aef-7a51-5246-d0fb-ddf0fed1e65b}">
           <p14:sldIdLst>
             <p14:sldId id="271"/>
             <p14:sldId id="272"/>

--- a/en/slides/16-Computer_Architecture-Permanent_Memory.pptx
+++ b/en/slides/16-Computer_Architecture-Permanent_Memory.pptx
@@ -126,32 +126,32 @@
   <p:extLst>
     <p:ext uri="{521415D9-36F7-43E2-AB2F-B90AF26B5E84}">
       <p14:sectionLst xmlns:p14="http://schemas.microsoft.com/office/powerpoint/2010/main">
-        <p14:section name="Opening" id="{21e85b30-3378-6d47-3ded-a0f84f9043b2}">
+        <p14:section name="Opening" id="{8577b958-0c96-1bb7-1512-3ff2a01113e2}">
           <p14:sldIdLst>
             <p14:sldId id="256"/>
             <p14:sldId id="257"/>
           </p14:sldIdLst>
         </p14:section>
-        <p14:section name="The components of a computer" id="{68ae35de-f7f4-dc83-a916-81d76ec22108}">
+        <p14:section name="The components of a computer" id="{da7b8eca-9513-9e97-6604-5bed560b1252}">
           <p14:sldIdLst>
             <p14:sldId id="258"/>
             <p14:sldId id="259"/>
           </p14:sldIdLst>
         </p14:section>
-        <p14:section name="Non-volatile memories" id="{abfd08f4-4168-e65b-eac2-75b78608484d}">
+        <p14:section name="Non-volatile memories" id="{ab685923-6c78-5b3c-475a-1d928939c069}">
           <p14:sldIdLst>
             <p14:sldId id="260"/>
             <p14:sldId id="261"/>
           </p14:sldIdLst>
         </p14:section>
-        <p14:section name="The cache" id="{2ab6deaf-674e-e96f-12f5-730b028d4c6e}">
+        <p14:section name="The cache" id="{0eb004e9-3b14-3d8f-34a9-2d843ebf3b1a}">
           <p14:sldIdLst>
             <p14:sldId id="262"/>
             <p14:sldId id="263"/>
             <p14:sldId id="264"/>
           </p14:sldIdLst>
         </p14:section>
-        <p14:section name="Secondary memory" id="{981992be-253d-fc1f-43da-6fa670bfa016}">
+        <p14:section name="Secondary memory" id="{69c892d1-0438-ef76-2aae-d06e220c3efc}">
           <p14:sldIdLst>
             <p14:sldId id="265"/>
             <p14:sldId id="266"/>
@@ -159,13 +159,13 @@
             <p14:sldId id="268"/>
           </p14:sldIdLst>
         </p14:section>
-        <p14:section name="Optical disks" id="{38d7f549-f229-9553-7d2e-017fa128fb34}">
+        <p14:section name="Optical disks" id="{5b104d3c-c7e3-0c9d-787a-fae411ee8fae}">
           <p14:sldIdLst>
             <p14:sldId id="269"/>
             <p14:sldId id="270"/>
           </p14:sldIdLst>
         </p14:section>
-        <p14:section name="Storage on several levels" id="{f2860aef-7a51-5246-d0fb-ddf0fed1e65b}">
+        <p14:section name="Storage on several levels" id="{af3e8eb9-d220-b1f0-d023-ae2c0364cb41}">
           <p14:sldIdLst>
             <p14:sldId id="271"/>
             <p14:sldId id="272"/>
@@ -581,6 +581,7 @@
               <a:t>The previous lecture treated the memory that forgets when power is removed. This one treats the memories that do not: the chips that hold the firmware, magnetic disks, optical media and tapes. Between the two it places the cache, a small fast memory that conceals the slowness of a large one, and the lecture's unifying idea is that this same strategy recurs at every scale. The epigraph is by a professor of numerical computing of this university, and every student eventually learns its truth: a datum does not exist until it has been saved.
 Learning status: UNDERSTAND NOW, by the end of this lecture you explain it, trace it and apply it on your own; USE NOW, you follow and use the recipe today; how it works inside is explained later, or is not part of the course; UNDERSTAND LATER, recognise the name and what it is for; a later lecture explains it. A slide without a badge is context: a story, an example, a question, an exercise.
 Learning status of this lecture. UNDERSTAND NOW: ROM, flash, firmware; the von Neumann architecture; the cache; secondary memory. USE NOW: the complete program, the PRG32 tools (used, not studied, in this course). UNDERSTAND LATER: nothing. A slide without a badge is context: a story, an example, a question, an exercise.
+Roadmap. Today's outcomes: (1) classify permanent memories and say where the cartridge is kept; (2) explain a cache hit and a cache miss, and locality; (3) compare the access times of disks and solid-state storage. Builds on: the von Neumann architecture (Lecture 03). Next: Lecture 17, Verm1, Part 3: A Body, Rules and States.
 For the lecturer: Spiral: a cartridge keeps its title string across a power cycle but loses its high score; the lecture explains where each lives, then covers ROM and flash, the cache, and mass storage.</a:t>
             </a:r>
             <a:endParaRPr lang="en-US" dirty="0"/>
@@ -1661,7 +1662,7 @@
             <a:r>
               <a:rPr lang="en-US" dirty="0"/>
               <a:t>Five conclusions. Non-volatile memories typically hold the firmware, the basic software of a machine. The cache improves performance by keeping a copy of part of main memory close to the processor. The same idea, a small fast level in front of a large slow one, recurs in storage systems. Permanent memories may be semiconductor, magnetic or optical. And a modern system comprises several levels, managed automatically. Part 3 of Verm1 follows, and uses memory as the project has not used it before.
-Learning status, recap. UNDERSTAND NOW: ROM, flash, firmware; the von Neumann architecture; the cache; secondary memory. USE NOW: the complete program, the PRG32 tools (used, not studied, in this course). UNDERSTAND LATER: nothing. A slide without a badge is context: a story, an example, a question, an exercise.
+Learning status, recap. UNDERSTAND NOW: ROM, flash, firmware; the von Neumann architecture; the cache; secondary memory. USE NOW: the complete program, the PRG32 tools (used, not studied, in this course). UNDERSTAND LATER: nothing. A slide without a badge is context: a story, an example, a question, an exercise. Closing thread: Memory is a hierarchy: small and fast near the processor, large and slow far away, and locality makes the trick work. Next: the third part of Verm1, which needs memory for a whole body. Exit ticket (two to four minutes, alone, on paper): 1. What happens on a cache miss? Why does a loop that reads an array in order have few misses? 2. Why can't the firmware and the cartridges of the kit live only in RAM? Which memory keeps them, and what is its limit?
 For the lecturer: Next: Verm1, part 3: a body, rules and states. Then the processor.</a:t>
             </a:r>
             <a:endParaRPr lang="en-US" dirty="0"/>
